--- a/_site/q1-q2-grundkurs/03-stochastik/wiederholung.pptx
+++ b/_site/q1-q2-grundkurs/03-stochastik/wiederholung.pptx
@@ -464,746 +464,707 @@
 </file>
 
 <file path=ppt/notesSlides/notesSlide1.xml><?xml version="1.0" encoding="utf-8"?>
-<p:notes xmlns:a="http://schemas.openxmlformats.org/drawingml/2006/main" xmlns:r="http://schemas.openxmlformats.org/officeDocument/2006/relationships" xmlns:p="http://schemas.openxmlformats.org/presentationml/2006/main">
-  <p:cSld>
-    <p:spTree>
-      <p:nvGrpSpPr>
-        <p:cNvPr id="1" name=""/>
-        <p:cNvGrpSpPr/>
-        <p:nvPr/>
-      </p:nvGrpSpPr>
-      <p:grpSpPr>
+<ns0:notes xmlns:a="http://schemas.openxmlformats.org/drawingml/2006/main" xmlns:ns0="http://schemas.openxmlformats.org/presentationml/2006/main" xmlns:ns2="http://schemas.microsoft.com/office/powerpoint/2010/main">
+  <ns0:cSld>
+    <ns0:spTree>
+      <ns0:nvGrpSpPr>
+        <ns0:cNvPr id="1" name=""/>
+        <ns0:cNvGrpSpPr/>
+        <ns0:nvPr/>
+      </ns0:nvGrpSpPr>
+      <ns0:grpSpPr>
         <a:xfrm>
           <a:off x="0" y="0"/>
           <a:ext cx="0" cy="0"/>
           <a:chOff x="0" y="0"/>
           <a:chExt cx="0" cy="0"/>
         </a:xfrm>
-      </p:grpSpPr>
-      <p:sp>
-        <p:nvSpPr>
-          <p:cNvPr id="2" name="Slide Image Placeholder 1"/>
-          <p:cNvSpPr>
+      </ns0:grpSpPr>
+      <ns0:sp>
+        <ns0:nvSpPr>
+          <ns0:cNvPr id="2" name="Slide Image Placeholder 1"/>
+          <ns0:cNvSpPr>
             <a:spLocks noGrp="1" noRot="1" noChangeAspect="1"/>
-          </p:cNvSpPr>
-          <p:nvPr>
-            <p:ph type="sldImg"/>
-          </p:nvPr>
-        </p:nvSpPr>
-        <p:spPr/>
-      </p:sp>
-      <p:sp>
-        <p:nvSpPr>
-          <p:cNvPr id="3" name="Notes Placeholder 2"/>
-          <p:cNvSpPr>
+          </ns0:cNvSpPr>
+          <ns0:nvPr>
+            <ns0:ph type="sldImg"/>
+          </ns0:nvPr>
+        </ns0:nvSpPr>
+        <ns0:spPr/>
+      </ns0:sp>
+      <ns0:sp>
+        <ns0:nvSpPr>
+          <ns0:cNvPr id="3" name="Notes Placeholder 2"/>
+          <ns0:cNvSpPr>
             <a:spLocks noGrp="1"/>
-          </p:cNvSpPr>
-          <p:nvPr>
-            <p:ph type="body" idx="1"/>
-          </p:nvPr>
-        </p:nvSpPr>
-        <p:spPr/>
-        <p:txBody>
+          </ns0:cNvSpPr>
+          <ns0:nvPr>
+            <ns0:ph type="body" idx="1"/>
+          </ns0:nvPr>
+        </ns0:nvSpPr>
+        <ns0:spPr/>
+        <ns0:txBody>
           <a:bodyPr/>
           <a:lstStyle/>
           <a:p>
             <a:r>
               <a:rPr lang="en-US" dirty="0"/>
-              <a:t>Themengebiet: Stochastik
-Stufe: Qualifikationsphase – Grundkurs (Q1/Q2)
-Die Präsentation ist als kurze Wiederholung vor bzw. zu Beginn einer Unterrichtsphase gedacht.</a:t>
+              <a:t/>
             </a:r>
             <a:endParaRPr lang="en-US" dirty="0"/>
           </a:p>
-        </p:txBody>
-      </p:sp>
-      <p:sp>
-        <p:nvSpPr>
-          <p:cNvPr id="4" name="Slide Number Placeholder 3"/>
-          <p:cNvSpPr>
+        </ns0:txBody>
+      </ns0:sp>
+      <ns0:sp>
+        <ns0:nvSpPr>
+          <ns0:cNvPr id="4" name="Slide Number Placeholder 3"/>
+          <ns0:cNvSpPr>
             <a:spLocks noGrp="1"/>
-          </p:cNvSpPr>
-          <p:nvPr>
-            <p:ph type="sldNum" sz="quarter" idx="10"/>
-          </p:nvPr>
-        </p:nvSpPr>
-        <p:spPr/>
-        <p:txBody>
+          </ns0:cNvSpPr>
+          <ns0:nvPr>
+            <ns0:ph type="sldNum" sz="quarter" idx="10"/>
+          </ns0:nvPr>
+        </ns0:nvSpPr>
+        <ns0:spPr/>
+        <ns0:txBody>
           <a:bodyPr/>
           <a:lstStyle/>
           <a:p>
             <a:fld id="{F7021451-1387-4CA6-816F-3879F97B5CBC}" type="slidenum">
               <a:rPr lang="en-US"/>
-              <a:t>1</a:t>
+              <a:t/>
             </a:fld>
             <a:endParaRPr lang="en-US"/>
           </a:p>
-        </p:txBody>
-      </p:sp>
-    </p:spTree>
-    <p:extLst>
-      <p:ext uri="{BB962C8B-B14F-4D97-AF65-F5344CB8AC3E}">
-        <p14:creationId xmlns:p14="http://schemas.microsoft.com/office/powerpoint/2010/main" val="1024086991"/>
-      </p:ext>
-    </p:extLst>
-  </p:cSld>
-  <p:clrMapOvr>
+        </ns0:txBody>
+      </ns0:sp>
+    </ns0:spTree>
+    <ns0:extLst>
+      <ns0:ext uri="{BB962C8B-B14F-4D97-AF65-F5344CB8AC3E}">
+        <ns2:creationId val="1024086991"/>
+      </ns0:ext>
+    </ns0:extLst>
+  </ns0:cSld>
+  <ns0:clrMapOvr>
     <a:masterClrMapping/>
-  </p:clrMapOvr>
-</p:notes>
+  </ns0:clrMapOvr>
+</ns0:notes>
 </file>
 
 <file path=ppt/notesSlides/notesSlide2.xml><?xml version="1.0" encoding="utf-8"?>
-<p:notes xmlns:a="http://schemas.openxmlformats.org/drawingml/2006/main" xmlns:r="http://schemas.openxmlformats.org/officeDocument/2006/relationships" xmlns:p="http://schemas.openxmlformats.org/presentationml/2006/main">
-  <p:cSld>
-    <p:spTree>
-      <p:nvGrpSpPr>
-        <p:cNvPr id="1" name=""/>
-        <p:cNvGrpSpPr/>
-        <p:nvPr/>
-      </p:nvGrpSpPr>
-      <p:grpSpPr>
+<ns0:notes xmlns:a="http://schemas.openxmlformats.org/drawingml/2006/main" xmlns:ns0="http://schemas.openxmlformats.org/presentationml/2006/main" xmlns:ns2="http://schemas.microsoft.com/office/powerpoint/2010/main">
+  <ns0:cSld>
+    <ns0:spTree>
+      <ns0:nvGrpSpPr>
+        <ns0:cNvPr id="1" name=""/>
+        <ns0:cNvGrpSpPr/>
+        <ns0:nvPr/>
+      </ns0:nvGrpSpPr>
+      <ns0:grpSpPr>
         <a:xfrm>
           <a:off x="0" y="0"/>
           <a:ext cx="0" cy="0"/>
           <a:chOff x="0" y="0"/>
           <a:chExt cx="0" cy="0"/>
         </a:xfrm>
-      </p:grpSpPr>
-      <p:sp>
-        <p:nvSpPr>
-          <p:cNvPr id="2" name="Slide Image Placeholder 1"/>
-          <p:cNvSpPr>
+      </ns0:grpSpPr>
+      <ns0:sp>
+        <ns0:nvSpPr>
+          <ns0:cNvPr id="2" name="Slide Image Placeholder 1"/>
+          <ns0:cNvSpPr>
             <a:spLocks noGrp="1" noRot="1" noChangeAspect="1"/>
-          </p:cNvSpPr>
-          <p:nvPr>
-            <p:ph type="sldImg"/>
-          </p:nvPr>
-        </p:nvSpPr>
-        <p:spPr/>
-      </p:sp>
-      <p:sp>
-        <p:nvSpPr>
-          <p:cNvPr id="3" name="Notes Placeholder 2"/>
-          <p:cNvSpPr>
+          </ns0:cNvSpPr>
+          <ns0:nvPr>
+            <ns0:ph type="sldImg"/>
+          </ns0:nvPr>
+        </ns0:nvSpPr>
+        <ns0:spPr/>
+      </ns0:sp>
+      <ns0:sp>
+        <ns0:nvSpPr>
+          <ns0:cNvPr id="3" name="Notes Placeholder 2"/>
+          <ns0:cNvSpPr>
             <a:spLocks noGrp="1"/>
-          </p:cNvSpPr>
-          <p:nvPr>
-            <p:ph type="body" idx="1"/>
-          </p:nvPr>
-        </p:nvSpPr>
-        <p:spPr/>
-        <p:txBody>
+          </ns0:cNvSpPr>
+          <ns0:nvPr>
+            <ns0:ph type="body" idx="1"/>
+          </ns0:nvPr>
+        </ns0:nvSpPr>
+        <ns0:spPr/>
+        <ns0:txBody>
           <a:bodyPr/>
           <a:lstStyle/>
           <a:p>
             <a:r>
               <a:rPr lang="en-US" dirty="0"/>
-              <a:t>1. Was bedeutet P(A|B)?
-Lösung: Wahrscheinlichkeit von A unter der Bedingung B.
-2. X nimmt 0 mit 0,4 und 1 mit 0,6 an. E(X)?
-Lösung: 0,6.
-3. Welche drei Bedingungen hat ein Binomialmodell?
-Lösung: Feste n, zwei Ausgänge je Versuch, konstantes p und Unabhängigkeit.
-4. Was bedeutet P(A|B)?
-Lösung: Wahrscheinlichkeit von A unter der Bedingung B.</a:t>
+              <a:t/>
             </a:r>
             <a:endParaRPr lang="en-US" dirty="0"/>
           </a:p>
-        </p:txBody>
-      </p:sp>
-      <p:sp>
-        <p:nvSpPr>
-          <p:cNvPr id="4" name="Slide Number Placeholder 3"/>
-          <p:cNvSpPr>
+        </ns0:txBody>
+      </ns0:sp>
+      <ns0:sp>
+        <ns0:nvSpPr>
+          <ns0:cNvPr id="4" name="Slide Number Placeholder 3"/>
+          <ns0:cNvSpPr>
             <a:spLocks noGrp="1"/>
-          </p:cNvSpPr>
-          <p:nvPr>
-            <p:ph type="sldNum" sz="quarter" idx="10"/>
-          </p:nvPr>
-        </p:nvSpPr>
-        <p:spPr/>
-        <p:txBody>
+          </ns0:cNvSpPr>
+          <ns0:nvPr>
+            <ns0:ph type="sldNum" sz="quarter" idx="10"/>
+          </ns0:nvPr>
+        </ns0:nvSpPr>
+        <ns0:spPr/>
+        <ns0:txBody>
           <a:bodyPr/>
           <a:lstStyle/>
           <a:p>
             <a:fld id="{F7021451-1387-4CA6-816F-3879F97B5CBC}" type="slidenum">
               <a:rPr lang="en-US"/>
-              <a:t>2</a:t>
+              <a:t/>
             </a:fld>
             <a:endParaRPr lang="en-US"/>
           </a:p>
-        </p:txBody>
-      </p:sp>
-    </p:spTree>
-    <p:extLst>
-      <p:ext uri="{BB962C8B-B14F-4D97-AF65-F5344CB8AC3E}">
-        <p14:creationId xmlns:p14="http://schemas.microsoft.com/office/powerpoint/2010/main" val="1024086991"/>
-      </p:ext>
-    </p:extLst>
-  </p:cSld>
-  <p:clrMapOvr>
+        </ns0:txBody>
+      </ns0:sp>
+    </ns0:spTree>
+    <ns0:extLst>
+      <ns0:ext uri="{BB962C8B-B14F-4D97-AF65-F5344CB8AC3E}">
+        <ns2:creationId val="1024086991"/>
+      </ns0:ext>
+    </ns0:extLst>
+  </ns0:cSld>
+  <ns0:clrMapOvr>
     <a:masterClrMapping/>
-  </p:clrMapOvr>
-</p:notes>
+  </ns0:clrMapOvr>
+</ns0:notes>
 </file>
 
 <file path=ppt/notesSlides/notesSlide3.xml><?xml version="1.0" encoding="utf-8"?>
-<p:notes xmlns:a="http://schemas.openxmlformats.org/drawingml/2006/main" xmlns:r="http://schemas.openxmlformats.org/officeDocument/2006/relationships" xmlns:p="http://schemas.openxmlformats.org/presentationml/2006/main">
-  <p:cSld>
-    <p:spTree>
-      <p:nvGrpSpPr>
-        <p:cNvPr id="1" name=""/>
-        <p:cNvGrpSpPr/>
-        <p:nvPr/>
-      </p:nvGrpSpPr>
-      <p:grpSpPr>
+<ns0:notes xmlns:a="http://schemas.openxmlformats.org/drawingml/2006/main" xmlns:ns0="http://schemas.openxmlformats.org/presentationml/2006/main" xmlns:ns2="http://schemas.microsoft.com/office/powerpoint/2010/main">
+  <ns0:cSld>
+    <ns0:spTree>
+      <ns0:nvGrpSpPr>
+        <ns0:cNvPr id="1" name=""/>
+        <ns0:cNvGrpSpPr/>
+        <ns0:nvPr/>
+      </ns0:nvGrpSpPr>
+      <ns0:grpSpPr>
         <a:xfrm>
           <a:off x="0" y="0"/>
           <a:ext cx="0" cy="0"/>
           <a:chOff x="0" y="0"/>
           <a:chExt cx="0" cy="0"/>
         </a:xfrm>
-      </p:grpSpPr>
-      <p:sp>
-        <p:nvSpPr>
-          <p:cNvPr id="2" name="Slide Image Placeholder 1"/>
-          <p:cNvSpPr>
+      </ns0:grpSpPr>
+      <ns0:sp>
+        <ns0:nvSpPr>
+          <ns0:cNvPr id="2" name="Slide Image Placeholder 1"/>
+          <ns0:cNvSpPr>
             <a:spLocks noGrp="1" noRot="1" noChangeAspect="1"/>
-          </p:cNvSpPr>
-          <p:nvPr>
-            <p:ph type="sldImg"/>
-          </p:nvPr>
-        </p:nvSpPr>
-        <p:spPr/>
-      </p:sp>
-      <p:sp>
-        <p:nvSpPr>
-          <p:cNvPr id="3" name="Notes Placeholder 2"/>
-          <p:cNvSpPr>
+          </ns0:cNvSpPr>
+          <ns0:nvPr>
+            <ns0:ph type="sldImg"/>
+          </ns0:nvPr>
+        </ns0:nvSpPr>
+        <ns0:spPr/>
+      </ns0:sp>
+      <ns0:sp>
+        <ns0:nvSpPr>
+          <ns0:cNvPr id="3" name="Notes Placeholder 2"/>
+          <ns0:cNvSpPr>
             <a:spLocks noGrp="1"/>
-          </p:cNvSpPr>
-          <p:nvPr>
-            <p:ph type="body" idx="1"/>
-          </p:nvPr>
-        </p:nvSpPr>
-        <p:spPr/>
-        <p:txBody>
+          </ns0:cNvSpPr>
+          <ns0:nvPr>
+            <ns0:ph type="body" idx="1"/>
+          </ns0:nvPr>
+        </ns0:nvSpPr>
+        <ns0:spPr/>
+        <ns0:txBody>
           <a:bodyPr/>
           <a:lstStyle/>
           <a:p>
             <a:r>
               <a:rPr lang="en-US" dirty="0"/>
-              <a:t>1. Welche Größe wird bei P(A|B) zum neuen „Ganzen“?
-Lösung: Die Fälle, in denen B eingetreten ist.
-2. Was beschreibt der Erwartungswert?
-Lösung: Langfristigen durchschnittlichen Wert bei vielen Wiederholungen.
-3. E(X) bei X~B(n,p)?
-Lösung: np.</a:t>
+              <a:t/>
             </a:r>
             <a:endParaRPr lang="en-US" dirty="0"/>
           </a:p>
-        </p:txBody>
-      </p:sp>
-      <p:sp>
-        <p:nvSpPr>
-          <p:cNvPr id="4" name="Slide Number Placeholder 3"/>
-          <p:cNvSpPr>
+        </ns0:txBody>
+      </ns0:sp>
+      <ns0:sp>
+        <ns0:nvSpPr>
+          <ns0:cNvPr id="4" name="Slide Number Placeholder 3"/>
+          <ns0:cNvSpPr>
             <a:spLocks noGrp="1"/>
-          </p:cNvSpPr>
-          <p:nvPr>
-            <p:ph type="sldNum" sz="quarter" idx="10"/>
-          </p:nvPr>
-        </p:nvSpPr>
-        <p:spPr/>
-        <p:txBody>
+          </ns0:cNvSpPr>
+          <ns0:nvPr>
+            <ns0:ph type="sldNum" sz="quarter" idx="10"/>
+          </ns0:nvPr>
+        </ns0:nvSpPr>
+        <ns0:spPr/>
+        <ns0:txBody>
           <a:bodyPr/>
           <a:lstStyle/>
           <a:p>
             <a:fld id="{F7021451-1387-4CA6-816F-3879F97B5CBC}" type="slidenum">
               <a:rPr lang="en-US"/>
-              <a:t>3</a:t>
+              <a:t/>
             </a:fld>
             <a:endParaRPr lang="en-US"/>
           </a:p>
-        </p:txBody>
-      </p:sp>
-    </p:spTree>
-    <p:extLst>
-      <p:ext uri="{BB962C8B-B14F-4D97-AF65-F5344CB8AC3E}">
-        <p14:creationId xmlns:p14="http://schemas.microsoft.com/office/powerpoint/2010/main" val="1024086991"/>
-      </p:ext>
-    </p:extLst>
-  </p:cSld>
-  <p:clrMapOvr>
+        </ns0:txBody>
+      </ns0:sp>
+    </ns0:spTree>
+    <ns0:extLst>
+      <ns0:ext uri="{BB962C8B-B14F-4D97-AF65-F5344CB8AC3E}">
+        <ns2:creationId val="1024086991"/>
+      </ns0:ext>
+    </ns0:extLst>
+  </ns0:cSld>
+  <ns0:clrMapOvr>
     <a:masterClrMapping/>
-  </p:clrMapOvr>
-</p:notes>
+  </ns0:clrMapOvr>
+</ns0:notes>
 </file>
 
 <file path=ppt/notesSlides/notesSlide4.xml><?xml version="1.0" encoding="utf-8"?>
-<p:notes xmlns:a="http://schemas.openxmlformats.org/drawingml/2006/main" xmlns:r="http://schemas.openxmlformats.org/officeDocument/2006/relationships" xmlns:p="http://schemas.openxmlformats.org/presentationml/2006/main">
-  <p:cSld>
-    <p:spTree>
-      <p:nvGrpSpPr>
-        <p:cNvPr id="1" name=""/>
-        <p:cNvGrpSpPr/>
-        <p:nvPr/>
-      </p:nvGrpSpPr>
-      <p:grpSpPr>
+<ns0:notes xmlns:a="http://schemas.openxmlformats.org/drawingml/2006/main" xmlns:ns0="http://schemas.openxmlformats.org/presentationml/2006/main" xmlns:ns2="http://schemas.microsoft.com/office/powerpoint/2010/main">
+  <ns0:cSld>
+    <ns0:spTree>
+      <ns0:nvGrpSpPr>
+        <ns0:cNvPr id="1" name=""/>
+        <ns0:cNvGrpSpPr/>
+        <ns0:nvPr/>
+      </ns0:nvGrpSpPr>
+      <ns0:grpSpPr>
         <a:xfrm>
           <a:off x="0" y="0"/>
           <a:ext cx="0" cy="0"/>
           <a:chOff x="0" y="0"/>
           <a:chExt cx="0" cy="0"/>
         </a:xfrm>
-      </p:grpSpPr>
-      <p:sp>
-        <p:nvSpPr>
-          <p:cNvPr id="2" name="Slide Image Placeholder 1"/>
-          <p:cNvSpPr>
+      </ns0:grpSpPr>
+      <ns0:sp>
+        <ns0:nvSpPr>
+          <ns0:cNvPr id="2" name="Slide Image Placeholder 1"/>
+          <ns0:cNvSpPr>
             <a:spLocks noGrp="1" noRot="1" noChangeAspect="1"/>
-          </p:cNvSpPr>
-          <p:nvPr>
-            <p:ph type="sldImg"/>
-          </p:nvPr>
-        </p:nvSpPr>
-        <p:spPr/>
-      </p:sp>
-      <p:sp>
-        <p:nvSpPr>
-          <p:cNvPr id="3" name="Notes Placeholder 2"/>
-          <p:cNvSpPr>
+          </ns0:cNvSpPr>
+          <ns0:nvPr>
+            <ns0:ph type="sldImg"/>
+          </ns0:nvPr>
+        </ns0:nvSpPr>
+        <ns0:spPr/>
+      </ns0:sp>
+      <ns0:sp>
+        <ns0:nvSpPr>
+          <ns0:cNvPr id="3" name="Notes Placeholder 2"/>
+          <ns0:cNvSpPr>
             <a:spLocks noGrp="1"/>
-          </p:cNvSpPr>
-          <p:nvPr>
-            <p:ph type="body" idx="1"/>
-          </p:nvPr>
-        </p:nvSpPr>
-        <p:spPr/>
-        <p:txBody>
+          </ns0:cNvSpPr>
+          <ns0:nvPr>
+            <ns0:ph type="body" idx="1"/>
+          </ns0:nvPr>
+        </ns0:nvSpPr>
+        <ns0:spPr/>
+        <ns0:txBody>
           <a:bodyPr/>
           <a:lstStyle/>
           <a:p>
             <a:r>
               <a:rPr lang="en-US" dirty="0"/>
-              <a:t>1. 40 Personen, 20 tragen Brille; davon 8 fahren Bus. P(Bus | Brille)?
-Lösung: 8/20=0,4.
-2. X: 0,1,2 mit P=0,25;0,5;0,25. E(X)?
-Lösung: 1.
-3. X~B(10,0,3): P(X=0)?
-Lösung: 0,7¹⁰ ≈ 0,0282.</a:t>
+              <a:t/>
             </a:r>
             <a:endParaRPr lang="en-US" dirty="0"/>
           </a:p>
-        </p:txBody>
-      </p:sp>
-      <p:sp>
-        <p:nvSpPr>
-          <p:cNvPr id="4" name="Slide Number Placeholder 3"/>
-          <p:cNvSpPr>
+        </ns0:txBody>
+      </ns0:sp>
+      <ns0:sp>
+        <ns0:nvSpPr>
+          <ns0:cNvPr id="4" name="Slide Number Placeholder 3"/>
+          <ns0:cNvSpPr>
             <a:spLocks noGrp="1"/>
-          </p:cNvSpPr>
-          <p:nvPr>
-            <p:ph type="sldNum" sz="quarter" idx="10"/>
-          </p:nvPr>
-        </p:nvSpPr>
-        <p:spPr/>
-        <p:txBody>
+          </ns0:cNvSpPr>
+          <ns0:nvPr>
+            <ns0:ph type="sldNum" sz="quarter" idx="10"/>
+          </ns0:nvPr>
+        </ns0:nvSpPr>
+        <ns0:spPr/>
+        <ns0:txBody>
           <a:bodyPr/>
           <a:lstStyle/>
           <a:p>
             <a:fld id="{F7021451-1387-4CA6-816F-3879F97B5CBC}" type="slidenum">
               <a:rPr lang="en-US"/>
-              <a:t>4</a:t>
+              <a:t/>
             </a:fld>
             <a:endParaRPr lang="en-US"/>
           </a:p>
-        </p:txBody>
-      </p:sp>
-    </p:spTree>
-    <p:extLst>
-      <p:ext uri="{BB962C8B-B14F-4D97-AF65-F5344CB8AC3E}">
-        <p14:creationId xmlns:p14="http://schemas.microsoft.com/office/powerpoint/2010/main" val="1024086991"/>
-      </p:ext>
-    </p:extLst>
-  </p:cSld>
-  <p:clrMapOvr>
+        </ns0:txBody>
+      </ns0:sp>
+    </ns0:spTree>
+    <ns0:extLst>
+      <ns0:ext uri="{BB962C8B-B14F-4D97-AF65-F5344CB8AC3E}">
+        <ns2:creationId val="1024086991"/>
+      </ns0:ext>
+    </ns0:extLst>
+  </ns0:cSld>
+  <ns0:clrMapOvr>
     <a:masterClrMapping/>
-  </p:clrMapOvr>
-</p:notes>
+  </ns0:clrMapOvr>
+</ns0:notes>
 </file>
 
 <file path=ppt/notesSlides/notesSlide5.xml><?xml version="1.0" encoding="utf-8"?>
-<p:notes xmlns:a="http://schemas.openxmlformats.org/drawingml/2006/main" xmlns:r="http://schemas.openxmlformats.org/officeDocument/2006/relationships" xmlns:p="http://schemas.openxmlformats.org/presentationml/2006/main">
-  <p:cSld>
-    <p:spTree>
-      <p:nvGrpSpPr>
-        <p:cNvPr id="1" name=""/>
-        <p:cNvGrpSpPr/>
-        <p:nvPr/>
-      </p:nvGrpSpPr>
-      <p:grpSpPr>
+<ns0:notes xmlns:a="http://schemas.openxmlformats.org/drawingml/2006/main" xmlns:ns0="http://schemas.openxmlformats.org/presentationml/2006/main" xmlns:ns2="http://schemas.microsoft.com/office/powerpoint/2010/main">
+  <ns0:cSld>
+    <ns0:spTree>
+      <ns0:nvGrpSpPr>
+        <ns0:cNvPr id="1" name=""/>
+        <ns0:cNvGrpSpPr/>
+        <ns0:nvPr/>
+      </ns0:nvGrpSpPr>
+      <ns0:grpSpPr>
         <a:xfrm>
           <a:off x="0" y="0"/>
           <a:ext cx="0" cy="0"/>
           <a:chOff x="0" y="0"/>
           <a:chExt cx="0" cy="0"/>
         </a:xfrm>
-      </p:grpSpPr>
-      <p:sp>
-        <p:nvSpPr>
-          <p:cNvPr id="2" name="Slide Image Placeholder 1"/>
-          <p:cNvSpPr>
+      </ns0:grpSpPr>
+      <ns0:sp>
+        <ns0:nvSpPr>
+          <ns0:cNvPr id="2" name="Slide Image Placeholder 1"/>
+          <ns0:cNvSpPr>
             <a:spLocks noGrp="1" noRot="1" noChangeAspect="1"/>
-          </p:cNvSpPr>
-          <p:nvPr>
-            <p:ph type="sldImg"/>
-          </p:nvPr>
-        </p:nvSpPr>
-        <p:spPr/>
-      </p:sp>
-      <p:sp>
-        <p:nvSpPr>
-          <p:cNvPr id="3" name="Notes Placeholder 2"/>
-          <p:cNvSpPr>
+          </ns0:cNvSpPr>
+          <ns0:nvPr>
+            <ns0:ph type="sldImg"/>
+          </ns0:nvPr>
+        </ns0:nvSpPr>
+        <ns0:spPr/>
+      </ns0:sp>
+      <ns0:sp>
+        <ns0:nvSpPr>
+          <ns0:cNvPr id="3" name="Notes Placeholder 2"/>
+          <ns0:cNvSpPr>
             <a:spLocks noGrp="1"/>
-          </p:cNvSpPr>
-          <p:nvPr>
-            <p:ph type="body" idx="1"/>
-          </p:nvPr>
-        </p:nvSpPr>
-        <p:spPr/>
-        <p:txBody>
+          </ns0:cNvSpPr>
+          <ns0:nvPr>
+            <ns0:ph type="body" idx="1"/>
+          </ns0:nvPr>
+        </ns0:nvSpPr>
+        <ns0:spPr/>
+        <ns0:txBody>
           <a:bodyPr/>
           <a:lstStyle/>
           <a:p>
             <a:r>
               <a:rPr lang="en-US" dirty="0"/>
-              <a:t>1. Was beschreibt der Erwartungswert?
-Lösung: Langfristigen durchschnittlichen Wert bei vielen Wiederholungen.
-2. X~B(10,0,3): P(X=0)?
-Lösung: 0,7¹⁰ ≈ 0,0282.</a:t>
+              <a:t/>
             </a:r>
             <a:endParaRPr lang="en-US" dirty="0"/>
           </a:p>
-        </p:txBody>
-      </p:sp>
-      <p:sp>
-        <p:nvSpPr>
-          <p:cNvPr id="4" name="Slide Number Placeholder 3"/>
-          <p:cNvSpPr>
+        </ns0:txBody>
+      </ns0:sp>
+      <ns0:sp>
+        <ns0:nvSpPr>
+          <ns0:cNvPr id="4" name="Slide Number Placeholder 3"/>
+          <ns0:cNvSpPr>
             <a:spLocks noGrp="1"/>
-          </p:cNvSpPr>
-          <p:nvPr>
-            <p:ph type="sldNum" sz="quarter" idx="10"/>
-          </p:nvPr>
-        </p:nvSpPr>
-        <p:spPr/>
-        <p:txBody>
+          </ns0:cNvSpPr>
+          <ns0:nvPr>
+            <ns0:ph type="sldNum" sz="quarter" idx="10"/>
+          </ns0:nvPr>
+        </ns0:nvSpPr>
+        <ns0:spPr/>
+        <ns0:txBody>
           <a:bodyPr/>
           <a:lstStyle/>
           <a:p>
             <a:fld id="{F7021451-1387-4CA6-816F-3879F97B5CBC}" type="slidenum">
               <a:rPr lang="en-US"/>
-              <a:t>5</a:t>
+              <a:t/>
             </a:fld>
             <a:endParaRPr lang="en-US"/>
           </a:p>
-        </p:txBody>
-      </p:sp>
-    </p:spTree>
-    <p:extLst>
-      <p:ext uri="{BB962C8B-B14F-4D97-AF65-F5344CB8AC3E}">
-        <p14:creationId xmlns:p14="http://schemas.microsoft.com/office/powerpoint/2010/main" val="1024086991"/>
-      </p:ext>
-    </p:extLst>
-  </p:cSld>
-  <p:clrMapOvr>
+        </ns0:txBody>
+      </ns0:sp>
+    </ns0:spTree>
+    <ns0:extLst>
+      <ns0:ext uri="{BB962C8B-B14F-4D97-AF65-F5344CB8AC3E}">
+        <ns2:creationId val="1024086991"/>
+      </ns0:ext>
+    </ns0:extLst>
+  </ns0:cSld>
+  <ns0:clrMapOvr>
     <a:masterClrMapping/>
-  </p:clrMapOvr>
-</p:notes>
+  </ns0:clrMapOvr>
+</ns0:notes>
 </file>
 
 <file path=ppt/notesSlides/notesSlide6.xml><?xml version="1.0" encoding="utf-8"?>
-<p:notes xmlns:a="http://schemas.openxmlformats.org/drawingml/2006/main" xmlns:r="http://schemas.openxmlformats.org/officeDocument/2006/relationships" xmlns:p="http://schemas.openxmlformats.org/presentationml/2006/main">
-  <p:cSld>
-    <p:spTree>
-      <p:nvGrpSpPr>
-        <p:cNvPr id="1" name=""/>
-        <p:cNvGrpSpPr/>
-        <p:nvPr/>
-      </p:nvGrpSpPr>
-      <p:grpSpPr>
+<ns0:notes xmlns:a="http://schemas.openxmlformats.org/drawingml/2006/main" xmlns:ns0="http://schemas.openxmlformats.org/presentationml/2006/main" xmlns:ns2="http://schemas.microsoft.com/office/powerpoint/2010/main">
+  <ns0:cSld>
+    <ns0:spTree>
+      <ns0:nvGrpSpPr>
+        <ns0:cNvPr id="1" name=""/>
+        <ns0:cNvGrpSpPr/>
+        <ns0:nvPr/>
+      </ns0:nvGrpSpPr>
+      <ns0:grpSpPr>
         <a:xfrm>
           <a:off x="0" y="0"/>
           <a:ext cx="0" cy="0"/>
           <a:chOff x="0" y="0"/>
           <a:chExt cx="0" cy="0"/>
         </a:xfrm>
-      </p:grpSpPr>
-      <p:sp>
-        <p:nvSpPr>
-          <p:cNvPr id="2" name="Slide Image Placeholder 1"/>
-          <p:cNvSpPr>
+      </ns0:grpSpPr>
+      <ns0:sp>
+        <ns0:nvSpPr>
+          <ns0:cNvPr id="2" name="Slide Image Placeholder 1"/>
+          <ns0:cNvSpPr>
             <a:spLocks noGrp="1" noRot="1" noChangeAspect="1"/>
-          </p:cNvSpPr>
-          <p:nvPr>
-            <p:ph type="sldImg"/>
-          </p:nvPr>
-        </p:nvSpPr>
-        <p:spPr/>
-      </p:sp>
-      <p:sp>
-        <p:nvSpPr>
-          <p:cNvPr id="3" name="Notes Placeholder 2"/>
-          <p:cNvSpPr>
+          </ns0:cNvSpPr>
+          <ns0:nvPr>
+            <ns0:ph type="sldImg"/>
+          </ns0:nvPr>
+        </ns0:nvSpPr>
+        <ns0:spPr/>
+      </ns0:sp>
+      <ns0:sp>
+        <ns0:nvSpPr>
+          <ns0:cNvPr id="3" name="Notes Placeholder 2"/>
+          <ns0:cNvSpPr>
             <a:spLocks noGrp="1"/>
-          </p:cNvSpPr>
-          <p:nvPr>
-            <p:ph type="body" idx="1"/>
-          </p:nvPr>
-        </p:nvSpPr>
-        <p:spPr/>
-        <p:txBody>
+          </ns0:cNvSpPr>
+          <ns0:nvPr>
+            <ns0:ph type="body" idx="1"/>
+          </ns0:nvPr>
+        </ns0:nvSpPr>
+        <ns0:spPr/>
+        <ns0:txBody>
           <a:bodyPr/>
           <a:lstStyle/>
           <a:p>
             <a:r>
               <a:rPr lang="en-US" dirty="0"/>
-              <a:t>1. X: 0,1,2 mit P=0,25;0,5;0,25. E(X)?
-Lösung: 1.
-2. X~B(10,0,3): P(X=0)?
-Lösung: 0,7¹⁰ ≈ 0,0282.</a:t>
+              <a:t/>
             </a:r>
             <a:endParaRPr lang="en-US" dirty="0"/>
           </a:p>
-        </p:txBody>
-      </p:sp>
-      <p:sp>
-        <p:nvSpPr>
-          <p:cNvPr id="4" name="Slide Number Placeholder 3"/>
-          <p:cNvSpPr>
+        </ns0:txBody>
+      </ns0:sp>
+      <ns0:sp>
+        <ns0:nvSpPr>
+          <ns0:cNvPr id="4" name="Slide Number Placeholder 3"/>
+          <ns0:cNvSpPr>
             <a:spLocks noGrp="1"/>
-          </p:cNvSpPr>
-          <p:nvPr>
-            <p:ph type="sldNum" sz="quarter" idx="10"/>
-          </p:nvPr>
-        </p:nvSpPr>
-        <p:spPr/>
-        <p:txBody>
+          </ns0:cNvSpPr>
+          <ns0:nvPr>
+            <ns0:ph type="sldNum" sz="quarter" idx="10"/>
+          </ns0:nvPr>
+        </ns0:nvSpPr>
+        <ns0:spPr/>
+        <ns0:txBody>
           <a:bodyPr/>
           <a:lstStyle/>
           <a:p>
             <a:fld id="{F7021451-1387-4CA6-816F-3879F97B5CBC}" type="slidenum">
               <a:rPr lang="en-US"/>
-              <a:t>6</a:t>
+              <a:t/>
             </a:fld>
             <a:endParaRPr lang="en-US"/>
           </a:p>
-        </p:txBody>
-      </p:sp>
-    </p:spTree>
-    <p:extLst>
-      <p:ext uri="{BB962C8B-B14F-4D97-AF65-F5344CB8AC3E}">
-        <p14:creationId xmlns:p14="http://schemas.microsoft.com/office/powerpoint/2010/main" val="1024086991"/>
-      </p:ext>
-    </p:extLst>
-  </p:cSld>
-  <p:clrMapOvr>
+        </ns0:txBody>
+      </ns0:sp>
+    </ns0:spTree>
+    <ns0:extLst>
+      <ns0:ext uri="{BB962C8B-B14F-4D97-AF65-F5344CB8AC3E}">
+        <ns2:creationId val="1024086991"/>
+      </ns0:ext>
+    </ns0:extLst>
+  </ns0:cSld>
+  <ns0:clrMapOvr>
     <a:masterClrMapping/>
-  </p:clrMapOvr>
-</p:notes>
+  </ns0:clrMapOvr>
+</ns0:notes>
 </file>
 
 <file path=ppt/notesSlides/notesSlide7.xml><?xml version="1.0" encoding="utf-8"?>
-<p:notes xmlns:a="http://schemas.openxmlformats.org/drawingml/2006/main" xmlns:r="http://schemas.openxmlformats.org/officeDocument/2006/relationships" xmlns:p="http://schemas.openxmlformats.org/presentationml/2006/main">
-  <p:cSld>
-    <p:spTree>
-      <p:nvGrpSpPr>
-        <p:cNvPr id="1" name=""/>
-        <p:cNvGrpSpPr/>
-        <p:nvPr/>
-      </p:nvGrpSpPr>
-      <p:grpSpPr>
+<ns0:notes xmlns:a="http://schemas.openxmlformats.org/drawingml/2006/main" xmlns:ns0="http://schemas.openxmlformats.org/presentationml/2006/main" xmlns:ns2="http://schemas.microsoft.com/office/powerpoint/2010/main">
+  <ns0:cSld>
+    <ns0:spTree>
+      <ns0:nvGrpSpPr>
+        <ns0:cNvPr id="1" name=""/>
+        <ns0:cNvGrpSpPr/>
+        <ns0:nvPr/>
+      </ns0:nvGrpSpPr>
+      <ns0:grpSpPr>
         <a:xfrm>
           <a:off x="0" y="0"/>
           <a:ext cx="0" cy="0"/>
           <a:chOff x="0" y="0"/>
           <a:chExt cx="0" cy="0"/>
         </a:xfrm>
-      </p:grpSpPr>
-      <p:sp>
-        <p:nvSpPr>
-          <p:cNvPr id="2" name="Slide Image Placeholder 1"/>
-          <p:cNvSpPr>
+      </ns0:grpSpPr>
+      <ns0:sp>
+        <ns0:nvSpPr>
+          <ns0:cNvPr id="2" name="Slide Image Placeholder 1"/>
+          <ns0:cNvSpPr>
             <a:spLocks noGrp="1" noRot="1" noChangeAspect="1"/>
-          </p:cNvSpPr>
-          <p:nvPr>
-            <p:ph type="sldImg"/>
-          </p:nvPr>
-        </p:nvSpPr>
-        <p:spPr/>
-      </p:sp>
-      <p:sp>
-        <p:nvSpPr>
-          <p:cNvPr id="3" name="Notes Placeholder 2"/>
-          <p:cNvSpPr>
+          </ns0:cNvSpPr>
+          <ns0:nvPr>
+            <ns0:ph type="sldImg"/>
+          </ns0:nvPr>
+        </ns0:nvSpPr>
+        <ns0:spPr/>
+      </ns0:sp>
+      <ns0:sp>
+        <ns0:nvSpPr>
+          <ns0:cNvPr id="3" name="Notes Placeholder 2"/>
+          <ns0:cNvSpPr>
             <a:spLocks noGrp="1"/>
-          </p:cNvSpPr>
-          <p:nvPr>
-            <p:ph type="body" idx="1"/>
-          </p:nvPr>
-        </p:nvSpPr>
-        <p:spPr/>
-        <p:txBody>
+          </ns0:cNvSpPr>
+          <ns0:nvPr>
+            <ns0:ph type="body" idx="1"/>
+          </ns0:nvPr>
+        </ns0:nvSpPr>
+        <ns0:spPr/>
+        <ns0:txBody>
           <a:bodyPr/>
           <a:lstStyle/>
           <a:p>
             <a:r>
               <a:rPr lang="en-US" dirty="0"/>
-              <a:t>1. Warum kann P(A|B) deutlich von P(A) abweichen?
-Lösung: Die Bedingung wählt eine andere Teilgruppe mit anderer Verteilung.
-2. Wie berechnest du P(X≥1) oft effizient?
-Lösung: 1−P(X=0).
-3. „Wahrscheinlichkeit 0,7 bedeutet: In 10 Versuchen treten genau 7 Treffer auf.“ – Korrigiere.
-Lösung: 0,7 ist eine langfristige relative Häufigkeit; in einzelnen Serien kann die Trefferzahl schwanken.</a:t>
+              <a:t/>
             </a:r>
             <a:endParaRPr lang="en-US" dirty="0"/>
           </a:p>
-        </p:txBody>
-      </p:sp>
-      <p:sp>
-        <p:nvSpPr>
-          <p:cNvPr id="4" name="Slide Number Placeholder 3"/>
-          <p:cNvSpPr>
+        </ns0:txBody>
+      </ns0:sp>
+      <ns0:sp>
+        <ns0:nvSpPr>
+          <ns0:cNvPr id="4" name="Slide Number Placeholder 3"/>
+          <ns0:cNvSpPr>
             <a:spLocks noGrp="1"/>
-          </p:cNvSpPr>
-          <p:nvPr>
-            <p:ph type="sldNum" sz="quarter" idx="10"/>
-          </p:nvPr>
-        </p:nvSpPr>
-        <p:spPr/>
-        <p:txBody>
+          </ns0:cNvSpPr>
+          <ns0:nvPr>
+            <ns0:ph type="sldNum" sz="quarter" idx="10"/>
+          </ns0:nvPr>
+        </ns0:nvSpPr>
+        <ns0:spPr/>
+        <ns0:txBody>
           <a:bodyPr/>
           <a:lstStyle/>
           <a:p>
             <a:fld id="{F7021451-1387-4CA6-816F-3879F97B5CBC}" type="slidenum">
               <a:rPr lang="en-US"/>
-              <a:t>7</a:t>
+              <a:t/>
             </a:fld>
             <a:endParaRPr lang="en-US"/>
           </a:p>
-        </p:txBody>
-      </p:sp>
-    </p:spTree>
-    <p:extLst>
-      <p:ext uri="{BB962C8B-B14F-4D97-AF65-F5344CB8AC3E}">
-        <p14:creationId xmlns:p14="http://schemas.microsoft.com/office/powerpoint/2010/main" val="1024086991"/>
-      </p:ext>
-    </p:extLst>
-  </p:cSld>
-  <p:clrMapOvr>
+        </ns0:txBody>
+      </ns0:sp>
+    </ns0:spTree>
+    <ns0:extLst>
+      <ns0:ext uri="{BB962C8B-B14F-4D97-AF65-F5344CB8AC3E}">
+        <ns2:creationId val="1024086991"/>
+      </ns0:ext>
+    </ns0:extLst>
+  </ns0:cSld>
+  <ns0:clrMapOvr>
     <a:masterClrMapping/>
-  </p:clrMapOvr>
-</p:notes>
+  </ns0:clrMapOvr>
+</ns0:notes>
 </file>
 
 <file path=ppt/notesSlides/notesSlide8.xml><?xml version="1.0" encoding="utf-8"?>
-<p:notes xmlns:a="http://schemas.openxmlformats.org/drawingml/2006/main" xmlns:r="http://schemas.openxmlformats.org/officeDocument/2006/relationships" xmlns:p="http://schemas.openxmlformats.org/presentationml/2006/main">
-  <p:cSld>
-    <p:spTree>
-      <p:nvGrpSpPr>
-        <p:cNvPr id="1" name=""/>
-        <p:cNvGrpSpPr/>
-        <p:nvPr/>
-      </p:nvGrpSpPr>
-      <p:grpSpPr>
+<ns0:notes xmlns:a="http://schemas.openxmlformats.org/drawingml/2006/main" xmlns:ns0="http://schemas.openxmlformats.org/presentationml/2006/main" xmlns:ns2="http://schemas.microsoft.com/office/powerpoint/2010/main">
+  <ns0:cSld>
+    <ns0:spTree>
+      <ns0:nvGrpSpPr>
+        <ns0:cNvPr id="1" name=""/>
+        <ns0:cNvGrpSpPr/>
+        <ns0:nvPr/>
+      </ns0:nvGrpSpPr>
+      <ns0:grpSpPr>
         <a:xfrm>
           <a:off x="0" y="0"/>
           <a:ext cx="0" cy="0"/>
           <a:chOff x="0" y="0"/>
           <a:chExt cx="0" cy="0"/>
         </a:xfrm>
-      </p:grpSpPr>
-      <p:sp>
-        <p:nvSpPr>
-          <p:cNvPr id="2" name="Slide Image Placeholder 1"/>
-          <p:cNvSpPr>
+      </ns0:grpSpPr>
+      <ns0:sp>
+        <ns0:nvSpPr>
+          <ns0:cNvPr id="2" name="Slide Image Placeholder 1"/>
+          <ns0:cNvSpPr>
             <a:spLocks noGrp="1" noRot="1" noChangeAspect="1"/>
-          </p:cNvSpPr>
-          <p:nvPr>
-            <p:ph type="sldImg"/>
-          </p:nvPr>
-        </p:nvSpPr>
-        <p:spPr/>
-      </p:sp>
-      <p:sp>
-        <p:nvSpPr>
-          <p:cNvPr id="3" name="Notes Placeholder 2"/>
-          <p:cNvSpPr>
+          </ns0:cNvSpPr>
+          <ns0:nvPr>
+            <ns0:ph type="sldImg"/>
+          </ns0:nvPr>
+        </ns0:nvSpPr>
+        <ns0:spPr/>
+      </ns0:sp>
+      <ns0:sp>
+        <ns0:nvSpPr>
+          <ns0:cNvPr id="3" name="Notes Placeholder 2"/>
+          <ns0:cNvSpPr>
             <a:spLocks noGrp="1"/>
-          </p:cNvSpPr>
-          <p:nvPr>
-            <p:ph type="body" idx="1"/>
-          </p:nvPr>
-        </p:nvSpPr>
-        <p:spPr/>
-        <p:txBody>
+          </ns0:cNvSpPr>
+          <ns0:nvPr>
+            <ns0:ph type="body" idx="1"/>
+          </ns0:nvPr>
+        </ns0:nvSpPr>
+        <ns0:spPr/>
+        <ns0:txBody>
           <a:bodyPr/>
           <a:lstStyle/>
           <a:p>
             <a:r>
               <a:rPr lang="en-US" dirty="0"/>
-              <a:t>1. Berechnen Sie P(X=2) für X~B(4;0,5).
-Lösung: P(X=2)=6·0,5⁴=0,375.
-2. Bestimmen Sie E(X) für X=0,1,2 mit P=0,25; 0,50; 0,25.
-Lösung: E(X)=0·0,25+1·0,50+2·0,25=1.
-3. Beschreiben Sie, was die Standardabweichung einer Zufallsgröße angibt.
-Lösung: Sie beschreibt die typische Streuung der Werte um den Erwartungswert.
-4. Interpretieren Sie P(A|B)=0,4 in Worten.
-Lösung: Unter der Bedingung B tritt A mit Wahrscheinlichkeit 0,4 auf.
-5. Beurteilen Sie die Aussage: „E(X)=3 bedeutet, dass X=3 am wahrscheinlichsten ist.“
-Lösung: Falsch. Der Erwartungswert ist ein langfristiger Mittelwert und muss nicht der wahrscheinlichste Einzelwert sein.</a:t>
+              <a:t/>
             </a:r>
             <a:endParaRPr lang="en-US" dirty="0"/>
           </a:p>
-        </p:txBody>
-      </p:sp>
-      <p:sp>
-        <p:nvSpPr>
-          <p:cNvPr id="4" name="Slide Number Placeholder 3"/>
-          <p:cNvSpPr>
+        </ns0:txBody>
+      </ns0:sp>
+      <ns0:sp>
+        <ns0:nvSpPr>
+          <ns0:cNvPr id="4" name="Slide Number Placeholder 3"/>
+          <ns0:cNvSpPr>
             <a:spLocks noGrp="1"/>
-          </p:cNvSpPr>
-          <p:nvPr>
-            <p:ph type="sldNum" sz="quarter" idx="10"/>
-          </p:nvPr>
-        </p:nvSpPr>
-        <p:spPr/>
-        <p:txBody>
+          </ns0:cNvSpPr>
+          <ns0:nvPr>
+            <ns0:ph type="sldNum" sz="quarter" idx="10"/>
+          </ns0:nvPr>
+        </ns0:nvSpPr>
+        <ns0:spPr/>
+        <ns0:txBody>
           <a:bodyPr/>
           <a:lstStyle/>
           <a:p>
             <a:fld id="{F7021451-1387-4CA6-816F-3879F97B5CBC}" type="slidenum">
               <a:rPr lang="en-US"/>
-              <a:t>8</a:t>
+              <a:t/>
             </a:fld>
             <a:endParaRPr lang="en-US"/>
           </a:p>
-        </p:txBody>
-      </p:sp>
-    </p:spTree>
-    <p:extLst>
-      <p:ext uri="{BB962C8B-B14F-4D97-AF65-F5344CB8AC3E}">
-        <p14:creationId xmlns:p14="http://schemas.microsoft.com/office/powerpoint/2010/main" val="1024086991"/>
-      </p:ext>
-    </p:extLst>
-  </p:cSld>
-  <p:clrMapOvr>
+        </ns0:txBody>
+      </ns0:sp>
+    </ns0:spTree>
+    <ns0:extLst>
+      <ns0:ext uri="{BB962C8B-B14F-4D97-AF65-F5344CB8AC3E}">
+        <ns2:creationId val="1024086991"/>
+      </ns0:ext>
+    </ns0:extLst>
+  </ns0:cSld>
+  <ns0:clrMapOvr>
     <a:masterClrMapping/>
-  </p:clrMapOvr>
-</p:notes>
+  </ns0:clrMapOvr>
+</ns0:notes>
 </file>
 
 <file path=ppt/slideLayouts/slideLayout1.xml><?xml version="1.0" encoding="utf-8"?>
@@ -2633,29 +2594,29 @@
 </file>
 
 <file path=ppt/slides/slide2.xml><?xml version="1.0" encoding="utf-8"?>
-<p:sld xmlns:a="http://schemas.openxmlformats.org/drawingml/2006/main" xmlns:r="http://schemas.openxmlformats.org/officeDocument/2006/relationships" xmlns:p="http://schemas.openxmlformats.org/presentationml/2006/main">
-  <p:cSld name="Slide 2">
-    <p:spTree>
-      <p:nvGrpSpPr>
-        <p:cNvPr id="1" name=""/>
-        <p:cNvGrpSpPr/>
-        <p:nvPr/>
-      </p:nvGrpSpPr>
-      <p:grpSpPr>
+<ns0:sld xmlns:a="http://schemas.openxmlformats.org/drawingml/2006/main" xmlns:ns0="http://schemas.openxmlformats.org/presentationml/2006/main" xmlns:ns2="http://schemas.microsoft.com/office/mac/drawingml/2011/main">
+  <ns0:cSld name="Slide 2">
+    <ns0:spTree>
+      <ns0:nvGrpSpPr>
+        <ns0:cNvPr id="1" name=""/>
+        <ns0:cNvGrpSpPr/>
+        <ns0:nvPr/>
+      </ns0:nvGrpSpPr>
+      <ns0:grpSpPr>
         <a:xfrm>
           <a:off x="0" y="0"/>
           <a:ext cx="0" cy="0"/>
           <a:chOff x="0" y="0"/>
           <a:chExt cx="0" cy="0"/>
         </a:xfrm>
-      </p:grpSpPr>
-      <p:sp>
-        <p:nvSpPr>
-          <p:cNvPr id="2" name="Text 0"/>
-          <p:cNvSpPr/>
-          <p:nvPr/>
-        </p:nvSpPr>
-        <p:spPr>
+      </ns0:grpSpPr>
+      <ns0:sp>
+        <ns0:nvSpPr>
+          <ns0:cNvPr id="2" name="Text 0"/>
+          <ns0:cNvSpPr/>
+          <ns0:nvPr/>
+        </ns0:nvSpPr>
+        <ns0:spPr>
           <a:xfrm>
             <a:off x="658368" y="658368"/>
             <a:ext cx="9784080" cy="475488"/>
@@ -2665,8 +2626,8 @@
           </a:prstGeom>
           <a:noFill/>
           <a:ln/>
-        </p:spPr>
-        <p:txBody>
+        </ns0:spPr>
+        <ns0:txBody>
           <a:bodyPr wrap="square" lIns="508" tIns="508" rIns="508" bIns="508" rtlCol="0" anchor="ctr">
             <a:normAutofit/>
           </a:bodyPr>
@@ -2688,15 +2649,15 @@
             </a:r>
             <a:endParaRPr lang="en-US" sz="2600" dirty="0"/>
           </a:p>
-        </p:txBody>
-      </p:sp>
-      <p:sp>
-        <p:nvSpPr>
-          <p:cNvPr id="3" name="Shape 1"/>
-          <p:cNvSpPr/>
-          <p:nvPr/>
-        </p:nvSpPr>
-        <p:spPr>
+        </ns0:txBody>
+      </ns0:sp>
+      <ns0:sp>
+        <ns0:nvSpPr>
+          <ns0:cNvPr id="3" name="Shape 1"/>
+          <ns0:cNvSpPr/>
+          <ns0:nvPr/>
+        </ns0:nvSpPr>
+        <ns0:spPr>
           <a:xfrm>
             <a:off x="10744200" y="694944"/>
             <a:ext cx="685800" cy="109728"/>
@@ -2713,15 +2674,15 @@
             </a:solidFill>
             <a:prstDash val="solid"/>
           </a:ln>
-        </p:spPr>
-      </p:sp>
-      <p:sp>
-        <p:nvSpPr>
-          <p:cNvPr id="4" name="Text 2"/>
-          <p:cNvSpPr/>
-          <p:nvPr/>
-        </p:nvSpPr>
-        <p:spPr>
+        </ns0:spPr>
+      </ns0:sp>
+      <ns0:sp>
+        <ns0:nvSpPr>
+          <ns0:cNvPr id="4" name="Text 2"/>
+          <ns0:cNvSpPr/>
+          <ns0:nvPr/>
+        </ns0:nvSpPr>
+        <ns0:spPr>
           <a:xfrm>
             <a:off x="676656" y="1152144"/>
             <a:ext cx="7772400" cy="256032"/>
@@ -2731,8 +2692,8 @@
           </a:prstGeom>
           <a:noFill/>
           <a:ln/>
-        </p:spPr>
-        <p:txBody>
+        </ns0:spPr>
+        <ns0:txBody>
           <a:bodyPr wrap="square" lIns="508" tIns="508" rIns="508" bIns="508" rtlCol="0" anchor="ctr">
             <a:normAutofit/>
           </a:bodyPr>
@@ -2754,15 +2715,15 @@
             </a:r>
             <a:endParaRPr lang="en-US" sz="1150" dirty="0"/>
           </a:p>
-        </p:txBody>
-      </p:sp>
-      <p:sp>
-        <p:nvSpPr>
-          <p:cNvPr id="5" name="Shape 3"/>
-          <p:cNvSpPr/>
-          <p:nvPr/>
-        </p:nvSpPr>
-        <p:spPr>
+        </ns0:txBody>
+      </ns0:sp>
+      <ns0:sp>
+        <ns0:nvSpPr>
+          <ns0:cNvPr id="5" name="Shape 3"/>
+          <ns0:cNvSpPr/>
+          <ns0:nvPr/>
+        </ns0:nvSpPr>
+        <ns0:spPr>
           <a:xfrm>
             <a:off x="731520" y="1600200"/>
             <a:ext cx="5257800" cy="1600200"/>
@@ -2788,15 +2749,15 @@
               </a:srgbClr>
             </a:outerShdw>
           </a:effectLst>
-        </p:spPr>
-      </p:sp>
-      <p:sp>
-        <p:nvSpPr>
-          <p:cNvPr id="6" name="Shape 4"/>
-          <p:cNvSpPr/>
-          <p:nvPr/>
-        </p:nvSpPr>
-        <p:spPr>
+        </ns0:spPr>
+      </ns0:sp>
+      <ns0:sp>
+        <ns0:nvSpPr>
+          <ns0:cNvPr id="6" name="Shape 4"/>
+          <ns0:cNvSpPr/>
+          <ns0:nvPr/>
+        </ns0:nvSpPr>
+        <ns0:spPr>
           <a:xfrm>
             <a:off x="896112" y="1764792"/>
             <a:ext cx="438912" cy="438912"/>
@@ -2813,15 +2774,15 @@
             </a:solidFill>
             <a:prstDash val="solid"/>
           </a:ln>
-        </p:spPr>
-      </p:sp>
-      <p:sp>
-        <p:nvSpPr>
-          <p:cNvPr id="7" name="Text 5"/>
-          <p:cNvSpPr/>
-          <p:nvPr/>
-        </p:nvSpPr>
-        <p:spPr>
+        </ns0:spPr>
+      </ns0:sp>
+      <ns0:sp>
+        <ns0:nvSpPr>
+          <ns0:cNvPr id="7" name="Text 5"/>
+          <ns0:cNvSpPr/>
+          <ns0:nvPr/>
+        </ns0:nvSpPr>
+        <ns0:spPr>
           <a:xfrm>
             <a:off x="896112" y="1764792"/>
             <a:ext cx="438912" cy="438912"/>
@@ -2831,8 +2792,8 @@
           </a:prstGeom>
           <a:noFill/>
           <a:ln/>
-        </p:spPr>
-        <p:txBody>
+        </ns0:spPr>
+        <ns0:txBody>
           <a:bodyPr wrap="square" lIns="508" tIns="508" rIns="508" bIns="508" rtlCol="0" anchor="ctr">
             <a:normAutofit/>
           </a:bodyPr>
@@ -2854,15 +2815,15 @@
             </a:r>
             <a:endParaRPr lang="en-US" sz="1300" dirty="0"/>
           </a:p>
-        </p:txBody>
-      </p:sp>
-      <p:sp>
-        <p:nvSpPr>
-          <p:cNvPr id="8" name="Text 6"/>
-          <p:cNvSpPr/>
-          <p:nvPr/>
-        </p:nvSpPr>
-        <p:spPr>
+        </ns0:txBody>
+      </ns0:sp>
+      <ns0:sp>
+        <ns0:nvSpPr>
+          <ns0:cNvPr id="8" name="Text 6"/>
+          <ns0:cNvSpPr/>
+          <ns0:nvPr/>
+        </ns0:nvSpPr>
+        <ns0:spPr>
           <a:xfrm>
             <a:off x="1463040" y="1755648"/>
             <a:ext cx="4361688" cy="1344168"/>
@@ -2872,8 +2833,8 @@
           </a:prstGeom>
           <a:noFill/>
           <a:ln/>
-        </p:spPr>
-        <p:txBody>
+        </ns0:spPr>
+        <ns0:txBody>
           <a:bodyPr wrap="square" lIns="508" tIns="508" rIns="508" bIns="508" rtlCol="0" anchor="ctr">
             <a:normAutofit/>
           </a:bodyPr>
@@ -2895,15 +2856,15 @@
             </a:r>
             <a:endParaRPr lang="en-US" sz="1650" dirty="0"/>
           </a:p>
-        </p:txBody>
-      </p:sp>
-      <p:sp>
-        <p:nvSpPr>
-          <p:cNvPr id="9" name="Shape 7"/>
-          <p:cNvSpPr/>
-          <p:nvPr/>
-        </p:nvSpPr>
-        <p:spPr>
+        </ns0:txBody>
+      </ns0:sp>
+      <ns0:sp>
+        <ns0:nvSpPr>
+          <ns0:cNvPr id="9" name="Shape 7"/>
+          <ns0:cNvSpPr/>
+          <ns0:nvPr/>
+        </ns0:nvSpPr>
+        <ns0:spPr>
           <a:xfrm>
             <a:off x="6199632" y="1600200"/>
             <a:ext cx="5257800" cy="1600200"/>
@@ -2929,15 +2890,15 @@
               </a:srgbClr>
             </a:outerShdw>
           </a:effectLst>
-        </p:spPr>
-      </p:sp>
-      <p:sp>
-        <p:nvSpPr>
-          <p:cNvPr id="10" name="Shape 8"/>
-          <p:cNvSpPr/>
-          <p:nvPr/>
-        </p:nvSpPr>
-        <p:spPr>
+        </ns0:spPr>
+      </ns0:sp>
+      <ns0:sp>
+        <ns0:nvSpPr>
+          <ns0:cNvPr id="10" name="Shape 8"/>
+          <ns0:cNvSpPr/>
+          <ns0:nvPr/>
+        </ns0:nvSpPr>
+        <ns0:spPr>
           <a:xfrm>
             <a:off x="6364224" y="1764792"/>
             <a:ext cx="438912" cy="438912"/>
@@ -2954,15 +2915,15 @@
             </a:solidFill>
             <a:prstDash val="solid"/>
           </a:ln>
-        </p:spPr>
-      </p:sp>
-      <p:sp>
-        <p:nvSpPr>
-          <p:cNvPr id="11" name="Text 9"/>
-          <p:cNvSpPr/>
-          <p:nvPr/>
-        </p:nvSpPr>
-        <p:spPr>
+        </ns0:spPr>
+      </ns0:sp>
+      <ns0:sp>
+        <ns0:nvSpPr>
+          <ns0:cNvPr id="11" name="Text 9"/>
+          <ns0:cNvSpPr/>
+          <ns0:nvPr/>
+        </ns0:nvSpPr>
+        <ns0:spPr>
           <a:xfrm>
             <a:off x="6364224" y="1764792"/>
             <a:ext cx="438912" cy="438912"/>
@@ -2972,8 +2933,8 @@
           </a:prstGeom>
           <a:noFill/>
           <a:ln/>
-        </p:spPr>
-        <p:txBody>
+        </ns0:spPr>
+        <ns0:txBody>
           <a:bodyPr wrap="square" lIns="508" tIns="508" rIns="508" bIns="508" rtlCol="0" anchor="ctr">
             <a:normAutofit/>
           </a:bodyPr>
@@ -2995,15 +2956,15 @@
             </a:r>
             <a:endParaRPr lang="en-US" sz="1300" dirty="0"/>
           </a:p>
-        </p:txBody>
-      </p:sp>
-      <p:sp>
-        <p:nvSpPr>
-          <p:cNvPr id="12" name="Text 10"/>
-          <p:cNvSpPr/>
-          <p:nvPr/>
-        </p:nvSpPr>
-        <p:spPr>
+        </ns0:txBody>
+      </ns0:sp>
+      <ns0:sp>
+        <ns0:nvSpPr>
+          <ns0:cNvPr id="12" name="Text 10"/>
+          <ns0:cNvSpPr/>
+          <ns0:nvPr/>
+        </ns0:nvSpPr>
+        <ns0:spPr>
           <a:xfrm>
             <a:off x="6931152" y="1755648"/>
             <a:ext cx="4361688" cy="1344168"/>
@@ -3013,8 +2974,8 @@
           </a:prstGeom>
           <a:noFill/>
           <a:ln/>
-        </p:spPr>
-        <p:txBody>
+        </ns0:spPr>
+        <ns0:txBody>
           <a:bodyPr wrap="square" lIns="508" tIns="508" rIns="508" bIns="508" rtlCol="0" anchor="ctr">
             <a:normAutofit/>
           </a:bodyPr>
@@ -3036,15 +2997,15 @@
             </a:r>
             <a:endParaRPr lang="en-US" sz="1650" dirty="0"/>
           </a:p>
-        </p:txBody>
-      </p:sp>
-      <p:sp>
-        <p:nvSpPr>
-          <p:cNvPr id="13" name="Shape 11"/>
-          <p:cNvSpPr/>
-          <p:nvPr/>
-        </p:nvSpPr>
-        <p:spPr>
+        </ns0:txBody>
+      </ns0:sp>
+      <ns0:sp>
+        <ns0:nvSpPr>
+          <ns0:cNvPr id="13" name="Shape 11"/>
+          <ns0:cNvSpPr/>
+          <ns0:nvPr/>
+        </ns0:nvSpPr>
+        <ns0:spPr>
           <a:xfrm>
             <a:off x="731520" y="3456432"/>
             <a:ext cx="5257800" cy="1600200"/>
@@ -3070,15 +3031,15 @@
               </a:srgbClr>
             </a:outerShdw>
           </a:effectLst>
-        </p:spPr>
-      </p:sp>
-      <p:sp>
-        <p:nvSpPr>
-          <p:cNvPr id="14" name="Shape 12"/>
-          <p:cNvSpPr/>
-          <p:nvPr/>
-        </p:nvSpPr>
-        <p:spPr>
+        </ns0:spPr>
+      </ns0:sp>
+      <ns0:sp>
+        <ns0:nvSpPr>
+          <ns0:cNvPr id="14" name="Shape 12"/>
+          <ns0:cNvSpPr/>
+          <ns0:nvPr/>
+        </ns0:nvSpPr>
+        <ns0:spPr>
           <a:xfrm>
             <a:off x="896112" y="3621024"/>
             <a:ext cx="438912" cy="438912"/>
@@ -3095,15 +3056,15 @@
             </a:solidFill>
             <a:prstDash val="solid"/>
           </a:ln>
-        </p:spPr>
-      </p:sp>
-      <p:sp>
-        <p:nvSpPr>
-          <p:cNvPr id="15" name="Text 13"/>
-          <p:cNvSpPr/>
-          <p:nvPr/>
-        </p:nvSpPr>
-        <p:spPr>
+        </ns0:spPr>
+      </ns0:sp>
+      <ns0:sp>
+        <ns0:nvSpPr>
+          <ns0:cNvPr id="15" name="Text 13"/>
+          <ns0:cNvSpPr/>
+          <ns0:nvPr/>
+        </ns0:nvSpPr>
+        <ns0:spPr>
           <a:xfrm>
             <a:off x="896112" y="3621024"/>
             <a:ext cx="438912" cy="438912"/>
@@ -3113,8 +3074,8 @@
           </a:prstGeom>
           <a:noFill/>
           <a:ln/>
-        </p:spPr>
-        <p:txBody>
+        </ns0:spPr>
+        <ns0:txBody>
           <a:bodyPr wrap="square" lIns="508" tIns="508" rIns="508" bIns="508" rtlCol="0" anchor="ctr">
             <a:normAutofit/>
           </a:bodyPr>
@@ -3136,15 +3097,15 @@
             </a:r>
             <a:endParaRPr lang="en-US" sz="1300" dirty="0"/>
           </a:p>
-        </p:txBody>
-      </p:sp>
-      <p:sp>
-        <p:nvSpPr>
-          <p:cNvPr id="16" name="Text 14"/>
-          <p:cNvSpPr/>
-          <p:nvPr/>
-        </p:nvSpPr>
-        <p:spPr>
+        </ns0:txBody>
+      </ns0:sp>
+      <ns0:sp>
+        <ns0:nvSpPr>
+          <ns0:cNvPr id="16" name="Text 14"/>
+          <ns0:cNvSpPr/>
+          <ns0:nvPr/>
+        </ns0:nvSpPr>
+        <ns0:spPr>
           <a:xfrm>
             <a:off x="1463040" y="3611880"/>
             <a:ext cx="4361688" cy="1344168"/>
@@ -3154,8 +3115,8 @@
           </a:prstGeom>
           <a:noFill/>
           <a:ln/>
-        </p:spPr>
-        <p:txBody>
+        </ns0:spPr>
+        <ns0:txBody>
           <a:bodyPr wrap="square" lIns="508" tIns="508" rIns="508" bIns="508" rtlCol="0" anchor="ctr">
             <a:normAutofit/>
           </a:bodyPr>
@@ -3177,15 +3138,15 @@
             </a:r>
             <a:endParaRPr lang="en-US" sz="1650" dirty="0"/>
           </a:p>
-        </p:txBody>
-      </p:sp>
-      <p:sp>
-        <p:nvSpPr>
-          <p:cNvPr id="17" name="Shape 15"/>
-          <p:cNvSpPr/>
-          <p:nvPr/>
-        </p:nvSpPr>
-        <p:spPr>
+        </ns0:txBody>
+      </ns0:sp>
+      <ns0:sp>
+        <ns0:nvSpPr>
+          <ns0:cNvPr id="17" name="Shape 15"/>
+          <ns0:cNvSpPr/>
+          <ns0:nvPr/>
+        </ns0:nvSpPr>
+        <ns0:spPr>
           <a:xfrm>
             <a:off x="6199632" y="3456432"/>
             <a:ext cx="5257800" cy="1600200"/>
@@ -3211,15 +3172,15 @@
               </a:srgbClr>
             </a:outerShdw>
           </a:effectLst>
-        </p:spPr>
-      </p:sp>
-      <p:sp>
-        <p:nvSpPr>
-          <p:cNvPr id="18" name="Shape 16"/>
-          <p:cNvSpPr/>
-          <p:nvPr/>
-        </p:nvSpPr>
-        <p:spPr>
+        </ns0:spPr>
+      </ns0:sp>
+      <ns0:sp>
+        <ns0:nvSpPr>
+          <ns0:cNvPr id="18" name="Shape 16"/>
+          <ns0:cNvSpPr/>
+          <ns0:nvPr/>
+        </ns0:nvSpPr>
+        <ns0:spPr>
           <a:xfrm>
             <a:off x="6364224" y="3621024"/>
             <a:ext cx="438912" cy="438912"/>
@@ -3236,15 +3197,15 @@
             </a:solidFill>
             <a:prstDash val="solid"/>
           </a:ln>
-        </p:spPr>
-      </p:sp>
-      <p:sp>
-        <p:nvSpPr>
-          <p:cNvPr id="19" name="Text 17"/>
-          <p:cNvSpPr/>
-          <p:nvPr/>
-        </p:nvSpPr>
-        <p:spPr>
+        </ns0:spPr>
+      </ns0:sp>
+      <ns0:sp>
+        <ns0:nvSpPr>
+          <ns0:cNvPr id="19" name="Text 17"/>
+          <ns0:cNvSpPr/>
+          <ns0:nvPr/>
+        </ns0:nvSpPr>
+        <ns0:spPr>
           <a:xfrm>
             <a:off x="6364224" y="3621024"/>
             <a:ext cx="438912" cy="438912"/>
@@ -3254,8 +3215,8 @@
           </a:prstGeom>
           <a:noFill/>
           <a:ln/>
-        </p:spPr>
-        <p:txBody>
+        </ns0:spPr>
+        <ns0:txBody>
           <a:bodyPr wrap="square" lIns="508" tIns="508" rIns="508" bIns="508" rtlCol="0" anchor="ctr">
             <a:normAutofit/>
           </a:bodyPr>
@@ -3277,15 +3238,15 @@
             </a:r>
             <a:endParaRPr lang="en-US" sz="1300" dirty="0"/>
           </a:p>
-        </p:txBody>
-      </p:sp>
-      <p:sp>
-        <p:nvSpPr>
-          <p:cNvPr id="20" name="Text 18"/>
-          <p:cNvSpPr/>
-          <p:nvPr/>
-        </p:nvSpPr>
-        <p:spPr>
+        </ns0:txBody>
+      </ns0:sp>
+      <ns0:sp>
+        <ns0:nvSpPr>
+          <ns0:cNvPr id="20" name="Text 18"/>
+          <ns0:cNvSpPr/>
+          <ns0:nvPr/>
+        </ns0:nvSpPr>
+        <ns0:spPr>
           <a:xfrm>
             <a:off x="6931152" y="3611880"/>
             <a:ext cx="4361688" cy="1344168"/>
@@ -3295,8 +3256,8 @@
           </a:prstGeom>
           <a:noFill/>
           <a:ln/>
-        </p:spPr>
-        <p:txBody>
+        </ns0:spPr>
+        <ns0:txBody>
           <a:bodyPr wrap="square" lIns="508" tIns="508" rIns="508" bIns="508" rtlCol="0" anchor="ctr">
             <a:normAutofit/>
           </a:bodyPr>
@@ -3318,15 +3279,15 @@
             </a:r>
             <a:endParaRPr lang="en-US" sz="1650" dirty="0"/>
           </a:p>
-        </p:txBody>
-      </p:sp>
-      <p:sp>
-        <p:nvSpPr>
-          <p:cNvPr id="21" name="Text 19"/>
-          <p:cNvSpPr/>
-          <p:nvPr/>
-        </p:nvSpPr>
-        <p:spPr>
+        </ns0:txBody>
+      </ns0:sp>
+      <ns0:sp>
+        <ns0:nvSpPr>
+          <ns0:cNvPr id="21" name="Text 19"/>
+          <ns0:cNvSpPr/>
+          <ns0:nvPr/>
+        </ns0:nvSpPr>
+        <ns0:spPr>
           <a:xfrm>
             <a:off x="749808" y="5532120"/>
             <a:ext cx="4754880" cy="274320"/>
@@ -3336,8 +3297,8 @@
           </a:prstGeom>
           <a:noFill/>
           <a:ln/>
-        </p:spPr>
-        <p:txBody>
+        </ns0:spPr>
+        <ns0:txBody>
           <a:bodyPr wrap="square" lIns="508" tIns="508" rIns="508" bIns="508" rtlCol="0" anchor="ctr">
             <a:normAutofit/>
           </a:bodyPr>
@@ -3355,23 +3316,23 @@
                 <a:ea typeface="Arial" pitchFamily="34" charset="-122"/>
                 <a:cs typeface="Arial" pitchFamily="34" charset="-120"/>
               </a:rPr>
-              <a:t>Ziel: erst Sicherheit gewinnen – dann steigern.</a:t>
+              <a:t/>
             </a:r>
             <a:endParaRPr lang="en-US" sz="1150" dirty="0"/>
           </a:p>
-        </p:txBody>
-      </p:sp>
-      <p:sp>
-        <p:nvSpPr>
-          <p:cNvPr id="25" name="Slide Number Placeholder 0"/>
-          <p:cNvSpPr>
+        </ns0:txBody>
+      </ns0:sp>
+      <ns0:sp>
+        <ns0:nvSpPr>
+          <ns0:cNvPr id="25" name="Slide Number Placeholder 0"/>
+          <ns0:cNvSpPr>
             <a:spLocks noGrp="1"/>
-          </p:cNvSpPr>
-          <p:nvPr>
-            <p:ph type="sldNum" sz="quarter" idx="4294967295"/>
-          </p:nvPr>
-        </p:nvSpPr>
-        <p:spPr>
+          </ns0:cNvSpPr>
+          <ns0:nvPr>
+            <ns0:ph type="sldNum" sz="quarter" idx="4294967295"/>
+          </ns0:nvPr>
+        </ns0:nvSpPr>
+        <ns0:spPr>
           <a:xfrm>
             <a:off x="11384280" y="6492240"/>
             <a:ext cx="320040" cy="164592"/>
@@ -3381,11 +3342,11 @@
           </a:prstGeom>
           <a:extLst>
             <a:ext uri="{C572A759-6A51-4108-AA02-DFA0A04FC94B}">
-              <ma14:wrappingTextBoxFlag xmlns:ma14="http://schemas.microsoft.com/office/mac/drawingml/2011/main" val="0"/>
+              <ns2:wrappingTextBoxFlag val="0"/>
             </a:ext>
           </a:extLst>
-        </p:spPr>
-        <p:txBody>
+        </ns0:spPr>
+        <ns0:txBody>
           <a:bodyPr/>
           <a:lstStyle>
             <a:lvl1pPr>
@@ -3407,14 +3368,14 @@
             </a:fld>
             <a:endParaRPr lang="en-US"/>
           </a:p>
-        </p:txBody>
-      </p:sp>
-    </p:spTree>
-  </p:cSld>
-  <p:clrMapOvr>
+        </ns0:txBody>
+      </ns0:sp>
+    </ns0:spTree>
+  </ns0:cSld>
+  <ns0:clrMapOvr>
     <a:masterClrMapping/>
-  </p:clrMapOvr>
-</p:sld>
+  </ns0:clrMapOvr>
+</ns0:sld>
 </file>
 
 <file path=ppt/slides/slide3.xml><?xml version="1.0" encoding="utf-8"?>
@@ -7110,29 +7071,29 @@
 </file>
 
 <file path=ppt/slides/slide8.xml><?xml version="1.0" encoding="utf-8"?>
-<p:sld xmlns:a="http://schemas.openxmlformats.org/drawingml/2006/main" xmlns:r="http://schemas.openxmlformats.org/officeDocument/2006/relationships" xmlns:p="http://schemas.openxmlformats.org/presentationml/2006/main">
-  <p:cSld name="Slide 8">
-    <p:spTree>
-      <p:nvGrpSpPr>
-        <p:cNvPr id="1" name=""/>
-        <p:cNvGrpSpPr/>
-        <p:nvPr/>
-      </p:nvGrpSpPr>
-      <p:grpSpPr>
+<ns0:sld xmlns:a="http://schemas.openxmlformats.org/drawingml/2006/main" xmlns:ns0="http://schemas.openxmlformats.org/presentationml/2006/main" xmlns:ns2="http://schemas.microsoft.com/office/mac/drawingml/2011/main">
+  <ns0:cSld name="Slide 8">
+    <ns0:spTree>
+      <ns0:nvGrpSpPr>
+        <ns0:cNvPr id="1" name=""/>
+        <ns0:cNvGrpSpPr/>
+        <ns0:nvPr/>
+      </ns0:nvGrpSpPr>
+      <ns0:grpSpPr>
         <a:xfrm>
           <a:off x="0" y="0"/>
           <a:ext cx="0" cy="0"/>
           <a:chOff x="0" y="0"/>
           <a:chExt cx="0" cy="0"/>
         </a:xfrm>
-      </p:grpSpPr>
-      <p:sp>
-        <p:nvSpPr>
-          <p:cNvPr id="2" name="Text 0"/>
-          <p:cNvSpPr/>
-          <p:nvPr/>
-        </p:nvSpPr>
-        <p:spPr>
+      </ns0:grpSpPr>
+      <ns0:sp>
+        <ns0:nvSpPr>
+          <ns0:cNvPr id="2" name="Text 0"/>
+          <ns0:cNvSpPr/>
+          <ns0:nvPr/>
+        </ns0:nvSpPr>
+        <ns0:spPr>
           <a:xfrm>
             <a:off x="685800" y="1207008"/>
             <a:ext cx="7680960" cy="512064"/>
@@ -7142,8 +7103,8 @@
           </a:prstGeom>
           <a:noFill/>
           <a:ln/>
-        </p:spPr>
-        <p:txBody>
+        </ns0:spPr>
+        <ns0:txBody>
           <a:bodyPr wrap="square" lIns="508" tIns="508" rIns="508" bIns="508" rtlCol="0" anchor="ctr">
             <a:normAutofit/>
           </a:bodyPr>
@@ -7161,19 +7122,19 @@
                 <a:ea typeface="Arial" pitchFamily="34" charset="-122"/>
                 <a:cs typeface="Arial" pitchFamily="34" charset="-120"/>
               </a:rPr>
-              <a:t>Kontrollfragen im Abiturstil</a:t>
+              <a:t>Kontrollfragen</a:t>
             </a:r>
             <a:endParaRPr lang="en-US" sz="2700" dirty="0"/>
           </a:p>
-        </p:txBody>
-      </p:sp>
-      <p:sp>
-        <p:nvSpPr>
-          <p:cNvPr id="3" name="Text 1"/>
-          <p:cNvSpPr/>
-          <p:nvPr/>
-        </p:nvSpPr>
-        <p:spPr>
+        </ns0:txBody>
+      </ns0:sp>
+      <ns0:sp>
+        <ns0:nvSpPr>
+          <ns0:cNvPr id="3" name="Text 1"/>
+          <ns0:cNvSpPr/>
+          <ns0:nvPr/>
+        </ns0:nvSpPr>
+        <ns0:spPr>
           <a:xfrm>
             <a:off x="713232" y="1737360"/>
             <a:ext cx="10424160" cy="256032"/>
@@ -7183,8 +7144,8 @@
           </a:prstGeom>
           <a:noFill/>
           <a:ln/>
-        </p:spPr>
-        <p:txBody>
+        </ns0:spPr>
+        <ns0:txBody>
           <a:bodyPr wrap="square" lIns="508" tIns="508" rIns="508" bIns="508" rtlCol="0" anchor="ctr">
             <a:normAutofit/>
           </a:bodyPr>
@@ -7202,19 +7163,19 @@
                 <a:ea typeface="Arial" pitchFamily="34" charset="-122"/>
                 <a:cs typeface="Arial" pitchFamily="34" charset="-120"/>
               </a:rPr>
-              <a:t>Qualifikationsphase – Grundkurs (Q1/Q2) · Stochastik · an wiederkehrenden Abitur-Schwerpunkten orientiert</a:t>
+              <a:t>Qualifikationsphase – Grundkurs (Q1/Q2) · Stochastik</a:t>
             </a:r>
             <a:endParaRPr lang="en-US" sz="1250" dirty="0"/>
           </a:p>
-        </p:txBody>
-      </p:sp>
-      <p:sp>
-        <p:nvSpPr>
-          <p:cNvPr id="4" name="Shape 2"/>
-          <p:cNvSpPr/>
-          <p:nvPr/>
-        </p:nvSpPr>
-        <p:spPr>
+        </ns0:txBody>
+      </ns0:sp>
+      <ns0:sp>
+        <ns0:nvSpPr>
+          <ns0:cNvPr id="4" name="Shape 2"/>
+          <ns0:cNvSpPr/>
+          <ns0:nvPr/>
+        </ns0:nvSpPr>
+        <ns0:spPr>
           <a:xfrm>
             <a:off x="731520" y="2331720"/>
             <a:ext cx="5230368" cy="841248"/>
@@ -7233,15 +7194,15 @@
             </a:solidFill>
             <a:prstDash val="solid"/>
           </a:ln>
-        </p:spPr>
-      </p:sp>
-      <p:sp>
-        <p:nvSpPr>
-          <p:cNvPr id="5" name="Shape 3"/>
-          <p:cNvSpPr/>
-          <p:nvPr/>
-        </p:nvSpPr>
-        <p:spPr>
+        </ns0:spPr>
+      </ns0:sp>
+      <ns0:sp>
+        <ns0:nvSpPr>
+          <ns0:cNvPr id="5" name="Shape 3"/>
+          <ns0:cNvSpPr/>
+          <ns0:nvPr/>
+        </ns0:nvSpPr>
+        <ns0:spPr>
           <a:xfrm>
             <a:off x="859536" y="2496312"/>
             <a:ext cx="1170432" cy="274320"/>
@@ -7260,15 +7221,15 @@
             </a:solidFill>
             <a:prstDash val="solid"/>
           </a:ln>
-        </p:spPr>
-      </p:sp>
-      <p:sp>
-        <p:nvSpPr>
-          <p:cNvPr id="6" name="Text 4"/>
-          <p:cNvSpPr/>
-          <p:nvPr/>
-        </p:nvSpPr>
-        <p:spPr>
+        </ns0:spPr>
+      </ns0:sp>
+      <ns0:sp>
+        <ns0:nvSpPr>
+          <ns0:cNvPr id="6" name="Text 4"/>
+          <ns0:cNvSpPr/>
+          <ns0:nvPr/>
+        </ns0:nvSpPr>
+        <ns0:spPr>
           <a:xfrm>
             <a:off x="896112" y="2514600"/>
             <a:ext cx="1097280" cy="210312"/>
@@ -7278,8 +7239,8 @@
           </a:prstGeom>
           <a:noFill/>
           <a:ln/>
-        </p:spPr>
-        <p:txBody>
+        </ns0:spPr>
+        <ns0:txBody>
           <a:bodyPr wrap="square" lIns="508" tIns="508" rIns="508" bIns="508" rtlCol="0" anchor="ctr">
             <a:normAutofit/>
           </a:bodyPr>
@@ -7301,15 +7262,15 @@
             </a:r>
             <a:endParaRPr lang="en-US" sz="820" dirty="0"/>
           </a:p>
-        </p:txBody>
-      </p:sp>
-      <p:sp>
-        <p:nvSpPr>
-          <p:cNvPr id="7" name="Text 5"/>
-          <p:cNvSpPr/>
-          <p:nvPr/>
-        </p:nvSpPr>
-        <p:spPr>
+        </ns0:txBody>
+      </ns0:sp>
+      <ns0:sp>
+        <ns0:nvSpPr>
+          <ns0:cNvPr id="7" name="Text 5"/>
+          <ns0:cNvSpPr/>
+          <ns0:nvPr/>
+        </ns0:nvSpPr>
+        <ns0:spPr>
           <a:xfrm>
             <a:off x="2194560" y="2432304"/>
             <a:ext cx="3621024" cy="621792"/>
@@ -7319,8 +7280,8 @@
           </a:prstGeom>
           <a:noFill/>
           <a:ln/>
-        </p:spPr>
-        <p:txBody>
+        </ns0:spPr>
+        <ns0:txBody>
           <a:bodyPr wrap="square" lIns="508" tIns="508" rIns="508" bIns="508" rtlCol="0" anchor="ctr">
             <a:normAutofit/>
           </a:bodyPr>
@@ -7342,15 +7303,15 @@
             </a:r>
             <a:endParaRPr lang="en-US" sz="1230" dirty="0"/>
           </a:p>
-        </p:txBody>
-      </p:sp>
-      <p:sp>
-        <p:nvSpPr>
-          <p:cNvPr id="8" name="Shape 6"/>
-          <p:cNvSpPr/>
-          <p:nvPr/>
-        </p:nvSpPr>
-        <p:spPr>
+        </ns0:txBody>
+      </ns0:sp>
+      <ns0:sp>
+        <ns0:nvSpPr>
+          <ns0:cNvPr id="8" name="Shape 6"/>
+          <ns0:cNvSpPr/>
+          <ns0:nvPr/>
+        </ns0:nvSpPr>
+        <ns0:spPr>
           <a:xfrm>
             <a:off x="6236208" y="2331720"/>
             <a:ext cx="5230368" cy="841248"/>
@@ -7369,15 +7330,15 @@
             </a:solidFill>
             <a:prstDash val="solid"/>
           </a:ln>
-        </p:spPr>
-      </p:sp>
-      <p:sp>
-        <p:nvSpPr>
-          <p:cNvPr id="9" name="Shape 7"/>
-          <p:cNvSpPr/>
-          <p:nvPr/>
-        </p:nvSpPr>
-        <p:spPr>
+        </ns0:spPr>
+      </ns0:sp>
+      <ns0:sp>
+        <ns0:nvSpPr>
+          <ns0:cNvPr id="9" name="Shape 7"/>
+          <ns0:cNvSpPr/>
+          <ns0:nvPr/>
+        </ns0:nvSpPr>
+        <ns0:spPr>
           <a:xfrm>
             <a:off x="6364224" y="2496312"/>
             <a:ext cx="1170432" cy="274320"/>
@@ -7396,15 +7357,15 @@
             </a:solidFill>
             <a:prstDash val="solid"/>
           </a:ln>
-        </p:spPr>
-      </p:sp>
-      <p:sp>
-        <p:nvSpPr>
-          <p:cNvPr id="10" name="Text 8"/>
-          <p:cNvSpPr/>
-          <p:nvPr/>
-        </p:nvSpPr>
-        <p:spPr>
+        </ns0:spPr>
+      </ns0:sp>
+      <ns0:sp>
+        <ns0:nvSpPr>
+          <ns0:cNvPr id="10" name="Text 8"/>
+          <ns0:cNvSpPr/>
+          <ns0:nvPr/>
+        </ns0:nvSpPr>
+        <ns0:spPr>
           <a:xfrm>
             <a:off x="6400800" y="2514600"/>
             <a:ext cx="1097280" cy="210312"/>
@@ -7414,8 +7375,8 @@
           </a:prstGeom>
           <a:noFill/>
           <a:ln/>
-        </p:spPr>
-        <p:txBody>
+        </ns0:spPr>
+        <ns0:txBody>
           <a:bodyPr wrap="square" lIns="508" tIns="508" rIns="508" bIns="508" rtlCol="0" anchor="ctr">
             <a:normAutofit/>
           </a:bodyPr>
@@ -7437,15 +7398,15 @@
             </a:r>
             <a:endParaRPr lang="en-US" sz="820" dirty="0"/>
           </a:p>
-        </p:txBody>
-      </p:sp>
-      <p:sp>
-        <p:nvSpPr>
-          <p:cNvPr id="11" name="Text 9"/>
-          <p:cNvSpPr/>
-          <p:nvPr/>
-        </p:nvSpPr>
-        <p:spPr>
+        </ns0:txBody>
+      </ns0:sp>
+      <ns0:sp>
+        <ns0:nvSpPr>
+          <ns0:cNvPr id="11" name="Text 9"/>
+          <ns0:cNvSpPr/>
+          <ns0:nvPr/>
+        </ns0:nvSpPr>
+        <ns0:spPr>
           <a:xfrm>
             <a:off x="7699248" y="2432304"/>
             <a:ext cx="3621024" cy="621792"/>
@@ -7455,8 +7416,8 @@
           </a:prstGeom>
           <a:noFill/>
           <a:ln/>
-        </p:spPr>
-        <p:txBody>
+        </ns0:spPr>
+        <ns0:txBody>
           <a:bodyPr wrap="square" lIns="508" tIns="508" rIns="508" bIns="508" rtlCol="0" anchor="ctr">
             <a:normAutofit/>
           </a:bodyPr>
@@ -7478,15 +7439,15 @@
             </a:r>
             <a:endParaRPr lang="en-US" sz="1230" dirty="0"/>
           </a:p>
-        </p:txBody>
-      </p:sp>
-      <p:sp>
-        <p:nvSpPr>
-          <p:cNvPr id="12" name="Shape 10"/>
-          <p:cNvSpPr/>
-          <p:nvPr/>
-        </p:nvSpPr>
-        <p:spPr>
+        </ns0:txBody>
+      </ns0:sp>
+      <ns0:sp>
+        <ns0:nvSpPr>
+          <ns0:cNvPr id="12" name="Shape 10"/>
+          <ns0:cNvSpPr/>
+          <ns0:nvPr/>
+        </ns0:nvSpPr>
+        <ns0:spPr>
           <a:xfrm>
             <a:off x="731520" y="3429000"/>
             <a:ext cx="5230368" cy="841248"/>
@@ -7505,15 +7466,15 @@
             </a:solidFill>
             <a:prstDash val="solid"/>
           </a:ln>
-        </p:spPr>
-      </p:sp>
-      <p:sp>
-        <p:nvSpPr>
-          <p:cNvPr id="13" name="Shape 11"/>
-          <p:cNvSpPr/>
-          <p:nvPr/>
-        </p:nvSpPr>
-        <p:spPr>
+        </ns0:spPr>
+      </ns0:sp>
+      <ns0:sp>
+        <ns0:nvSpPr>
+          <ns0:cNvPr id="13" name="Shape 11"/>
+          <ns0:cNvSpPr/>
+          <ns0:nvPr/>
+        </ns0:nvSpPr>
+        <ns0:spPr>
           <a:xfrm>
             <a:off x="859536" y="3593592"/>
             <a:ext cx="1170432" cy="274320"/>
@@ -7532,15 +7493,15 @@
             </a:solidFill>
             <a:prstDash val="solid"/>
           </a:ln>
-        </p:spPr>
-      </p:sp>
-      <p:sp>
-        <p:nvSpPr>
-          <p:cNvPr id="14" name="Text 12"/>
-          <p:cNvSpPr/>
-          <p:nvPr/>
-        </p:nvSpPr>
-        <p:spPr>
+        </ns0:spPr>
+      </ns0:sp>
+      <ns0:sp>
+        <ns0:nvSpPr>
+          <ns0:cNvPr id="14" name="Text 12"/>
+          <ns0:cNvSpPr/>
+          <ns0:nvPr/>
+        </ns0:nvSpPr>
+        <ns0:spPr>
           <a:xfrm>
             <a:off x="896112" y="3611880"/>
             <a:ext cx="1097280" cy="210312"/>
@@ -7550,8 +7511,8 @@
           </a:prstGeom>
           <a:noFill/>
           <a:ln/>
-        </p:spPr>
-        <p:txBody>
+        </ns0:spPr>
+        <ns0:txBody>
           <a:bodyPr wrap="square" lIns="508" tIns="508" rIns="508" bIns="508" rtlCol="0" anchor="ctr">
             <a:normAutofit/>
           </a:bodyPr>
@@ -7573,15 +7534,15 @@
             </a:r>
             <a:endParaRPr lang="en-US" sz="820" dirty="0"/>
           </a:p>
-        </p:txBody>
-      </p:sp>
-      <p:sp>
-        <p:nvSpPr>
-          <p:cNvPr id="15" name="Text 13"/>
-          <p:cNvSpPr/>
-          <p:nvPr/>
-        </p:nvSpPr>
-        <p:spPr>
+        </ns0:txBody>
+      </ns0:sp>
+      <ns0:sp>
+        <ns0:nvSpPr>
+          <ns0:cNvPr id="15" name="Text 13"/>
+          <ns0:cNvSpPr/>
+          <ns0:nvPr/>
+        </ns0:nvSpPr>
+        <ns0:spPr>
           <a:xfrm>
             <a:off x="2194560" y="3529584"/>
             <a:ext cx="3621024" cy="621792"/>
@@ -7591,8 +7552,8 @@
           </a:prstGeom>
           <a:noFill/>
           <a:ln/>
-        </p:spPr>
-        <p:txBody>
+        </ns0:spPr>
+        <ns0:txBody>
           <a:bodyPr wrap="square" lIns="508" tIns="508" rIns="508" bIns="508" rtlCol="0" anchor="ctr">
             <a:normAutofit/>
           </a:bodyPr>
@@ -7614,15 +7575,15 @@
             </a:r>
             <a:endParaRPr lang="en-US" sz="1230" dirty="0"/>
           </a:p>
-        </p:txBody>
-      </p:sp>
-      <p:sp>
-        <p:nvSpPr>
-          <p:cNvPr id="16" name="Shape 14"/>
-          <p:cNvSpPr/>
-          <p:nvPr/>
-        </p:nvSpPr>
-        <p:spPr>
+        </ns0:txBody>
+      </ns0:sp>
+      <ns0:sp>
+        <ns0:nvSpPr>
+          <ns0:cNvPr id="16" name="Shape 14"/>
+          <ns0:cNvSpPr/>
+          <ns0:nvPr/>
+        </ns0:nvSpPr>
+        <ns0:spPr>
           <a:xfrm>
             <a:off x="6236208" y="3429000"/>
             <a:ext cx="5230368" cy="841248"/>
@@ -7641,15 +7602,15 @@
             </a:solidFill>
             <a:prstDash val="solid"/>
           </a:ln>
-        </p:spPr>
-      </p:sp>
-      <p:sp>
-        <p:nvSpPr>
-          <p:cNvPr id="17" name="Shape 15"/>
-          <p:cNvSpPr/>
-          <p:nvPr/>
-        </p:nvSpPr>
-        <p:spPr>
+        </ns0:spPr>
+      </ns0:sp>
+      <ns0:sp>
+        <ns0:nvSpPr>
+          <ns0:cNvPr id="17" name="Shape 15"/>
+          <ns0:cNvSpPr/>
+          <ns0:nvPr/>
+        </ns0:nvSpPr>
+        <ns0:spPr>
           <a:xfrm>
             <a:off x="6364224" y="3593592"/>
             <a:ext cx="1170432" cy="274320"/>
@@ -7668,15 +7629,15 @@
             </a:solidFill>
             <a:prstDash val="solid"/>
           </a:ln>
-        </p:spPr>
-      </p:sp>
-      <p:sp>
-        <p:nvSpPr>
-          <p:cNvPr id="18" name="Text 16"/>
-          <p:cNvSpPr/>
-          <p:nvPr/>
-        </p:nvSpPr>
-        <p:spPr>
+        </ns0:spPr>
+      </ns0:sp>
+      <ns0:sp>
+        <ns0:nvSpPr>
+          <ns0:cNvPr id="18" name="Text 16"/>
+          <ns0:cNvSpPr/>
+          <ns0:nvPr/>
+        </ns0:nvSpPr>
+        <ns0:spPr>
           <a:xfrm>
             <a:off x="6400800" y="3611880"/>
             <a:ext cx="1097280" cy="210312"/>
@@ -7686,8 +7647,8 @@
           </a:prstGeom>
           <a:noFill/>
           <a:ln/>
-        </p:spPr>
-        <p:txBody>
+        </ns0:spPr>
+        <ns0:txBody>
           <a:bodyPr wrap="square" lIns="508" tIns="508" rIns="508" bIns="508" rtlCol="0" anchor="ctr">
             <a:normAutofit/>
           </a:bodyPr>
@@ -7709,15 +7670,15 @@
             </a:r>
             <a:endParaRPr lang="en-US" sz="820" dirty="0"/>
           </a:p>
-        </p:txBody>
-      </p:sp>
-      <p:sp>
-        <p:nvSpPr>
-          <p:cNvPr id="19" name="Text 17"/>
-          <p:cNvSpPr/>
-          <p:nvPr/>
-        </p:nvSpPr>
-        <p:spPr>
+        </ns0:txBody>
+      </ns0:sp>
+      <ns0:sp>
+        <ns0:nvSpPr>
+          <ns0:cNvPr id="19" name="Text 17"/>
+          <ns0:cNvSpPr/>
+          <ns0:nvPr/>
+        </ns0:nvSpPr>
+        <ns0:spPr>
           <a:xfrm>
             <a:off x="7699248" y="3529584"/>
             <a:ext cx="3621024" cy="621792"/>
@@ -7727,8 +7688,8 @@
           </a:prstGeom>
           <a:noFill/>
           <a:ln/>
-        </p:spPr>
-        <p:txBody>
+        </ns0:spPr>
+        <ns0:txBody>
           <a:bodyPr wrap="square" lIns="508" tIns="508" rIns="508" bIns="508" rtlCol="0" anchor="ctr">
             <a:normAutofit/>
           </a:bodyPr>
@@ -7750,15 +7711,15 @@
             </a:r>
             <a:endParaRPr lang="en-US" sz="1230" dirty="0"/>
           </a:p>
-        </p:txBody>
-      </p:sp>
-      <p:sp>
-        <p:nvSpPr>
-          <p:cNvPr id="20" name="Shape 18"/>
-          <p:cNvSpPr/>
-          <p:nvPr/>
-        </p:nvSpPr>
-        <p:spPr>
+        </ns0:txBody>
+      </ns0:sp>
+      <ns0:sp>
+        <ns0:nvSpPr>
+          <ns0:cNvPr id="20" name="Shape 18"/>
+          <ns0:cNvSpPr/>
+          <ns0:nvPr/>
+        </ns0:nvSpPr>
+        <ns0:spPr>
           <a:xfrm>
             <a:off x="731520" y="4526280"/>
             <a:ext cx="10762488" cy="841248"/>
@@ -7777,15 +7738,15 @@
             </a:solidFill>
             <a:prstDash val="solid"/>
           </a:ln>
-        </p:spPr>
-      </p:sp>
-      <p:sp>
-        <p:nvSpPr>
-          <p:cNvPr id="21" name="Shape 19"/>
-          <p:cNvSpPr/>
-          <p:nvPr/>
-        </p:nvSpPr>
-        <p:spPr>
+        </ns0:spPr>
+      </ns0:sp>
+      <ns0:sp>
+        <ns0:nvSpPr>
+          <ns0:cNvPr id="21" name="Shape 19"/>
+          <ns0:cNvSpPr/>
+          <ns0:nvPr/>
+        </ns0:nvSpPr>
+        <ns0:spPr>
           <a:xfrm>
             <a:off x="859536" y="4690872"/>
             <a:ext cx="1234440" cy="274320"/>
@@ -7804,15 +7765,15 @@
             </a:solidFill>
             <a:prstDash val="solid"/>
           </a:ln>
-        </p:spPr>
-      </p:sp>
-      <p:sp>
-        <p:nvSpPr>
-          <p:cNvPr id="22" name="Text 20"/>
-          <p:cNvSpPr/>
-          <p:nvPr/>
-        </p:nvSpPr>
-        <p:spPr>
+        </ns0:spPr>
+      </ns0:sp>
+      <ns0:sp>
+        <ns0:nvSpPr>
+          <ns0:cNvPr id="22" name="Text 20"/>
+          <ns0:cNvSpPr/>
+          <ns0:nvPr/>
+        </ns0:nvSpPr>
+        <ns0:spPr>
           <a:xfrm>
             <a:off x="896112" y="4709160"/>
             <a:ext cx="1161288" cy="210312"/>
@@ -7822,8 +7783,8 @@
           </a:prstGeom>
           <a:noFill/>
           <a:ln/>
-        </p:spPr>
-        <p:txBody>
+        </ns0:spPr>
+        <ns0:txBody>
           <a:bodyPr wrap="square" lIns="508" tIns="508" rIns="508" bIns="508" rtlCol="0" anchor="ctr">
             <a:normAutofit/>
           </a:bodyPr>
@@ -7845,15 +7806,15 @@
             </a:r>
             <a:endParaRPr lang="en-US" sz="820" dirty="0"/>
           </a:p>
-        </p:txBody>
-      </p:sp>
-      <p:sp>
-        <p:nvSpPr>
-          <p:cNvPr id="23" name="Text 21"/>
-          <p:cNvSpPr/>
-          <p:nvPr/>
-        </p:nvSpPr>
-        <p:spPr>
+        </ns0:txBody>
+      </ns0:sp>
+      <ns0:sp>
+        <ns0:nvSpPr>
+          <ns0:cNvPr id="23" name="Text 21"/>
+          <ns0:cNvSpPr/>
+          <ns0:nvPr/>
+        </ns0:nvSpPr>
+        <ns0:spPr>
           <a:xfrm>
             <a:off x="2258568" y="4626864"/>
             <a:ext cx="9089136" cy="621792"/>
@@ -7863,8 +7824,8 @@
           </a:prstGeom>
           <a:noFill/>
           <a:ln/>
-        </p:spPr>
-        <p:txBody>
+        </ns0:spPr>
+        <ns0:txBody>
           <a:bodyPr wrap="square" lIns="508" tIns="508" rIns="508" bIns="508" rtlCol="0" anchor="ctr">
             <a:normAutofit/>
           </a:bodyPr>
@@ -7886,15 +7847,15 @@
             </a:r>
             <a:endParaRPr lang="en-US" sz="1300" dirty="0"/>
           </a:p>
-        </p:txBody>
-      </p:sp>
-      <p:sp>
-        <p:nvSpPr>
-          <p:cNvPr id="24" name="Text 22"/>
-          <p:cNvSpPr/>
-          <p:nvPr/>
-        </p:nvSpPr>
-        <p:spPr>
+        </ns0:txBody>
+      </ns0:sp>
+      <ns0:sp>
+        <ns0:nvSpPr>
+          <ns0:cNvPr id="24" name="Text 22"/>
+          <ns0:cNvSpPr/>
+          <ns0:nvPr/>
+        </ns0:nvSpPr>
+        <ns0:spPr>
           <a:xfrm>
             <a:off x="749808" y="5632704"/>
             <a:ext cx="5760720" cy="219456"/>
@@ -7904,8 +7865,8 @@
           </a:prstGeom>
           <a:noFill/>
           <a:ln/>
-        </p:spPr>
-        <p:txBody>
+        </ns0:spPr>
+        <ns0:txBody>
           <a:bodyPr wrap="square" lIns="508" tIns="508" rIns="508" bIns="508" rtlCol="0" anchor="ctr">
             <a:normAutofit/>
           </a:bodyPr>
@@ -7923,19 +7884,19 @@
                 <a:ea typeface="Arial" pitchFamily="34" charset="-122"/>
                 <a:cs typeface="Arial" pitchFamily="34" charset="-120"/>
               </a:rPr>
-              <a:t>Operatoren gemäß Standardsicherung NRW · gültig ab Abitur 2023</a:t>
+              <a:t/>
             </a:r>
             <a:endParaRPr lang="en-US" sz="940" dirty="0"/>
           </a:p>
-        </p:txBody>
-      </p:sp>
-      <p:sp>
-        <p:nvSpPr>
-          <p:cNvPr id="25" name="Text 23"/>
-          <p:cNvSpPr/>
-          <p:nvPr/>
-        </p:nvSpPr>
-        <p:spPr>
+        </ns0:txBody>
+      </ns0:sp>
+      <ns0:sp>
+        <ns0:nvSpPr>
+          <ns0:cNvPr id="25" name="Text 23"/>
+          <ns0:cNvSpPr/>
+          <ns0:nvPr/>
+        </ns0:nvSpPr>
+        <ns0:spPr>
           <a:xfrm>
             <a:off x="6629400" y="5605272"/>
             <a:ext cx="960120" cy="201168"/>
@@ -7945,8 +7906,8 @@
           </a:prstGeom>
           <a:noFill/>
           <a:ln/>
-        </p:spPr>
-        <p:txBody>
+        </ns0:spPr>
+        <ns0:txBody>
           <a:bodyPr wrap="square" lIns="508" tIns="508" rIns="508" bIns="508" rtlCol="0" anchor="ctr">
             <a:normAutofit/>
           </a:bodyPr>
@@ -7968,15 +7929,15 @@
             </a:r>
             <a:endParaRPr lang="en-US" sz="980" dirty="0"/>
           </a:p>
-        </p:txBody>
-      </p:sp>
-      <p:sp>
-        <p:nvSpPr>
-          <p:cNvPr id="26" name="Shape 24"/>
-          <p:cNvSpPr/>
-          <p:nvPr/>
-        </p:nvSpPr>
-        <p:spPr>
+        </ns0:txBody>
+      </ns0:sp>
+      <ns0:sp>
+        <ns0:nvSpPr>
+          <ns0:cNvPr id="26" name="Shape 24"/>
+          <ns0:cNvSpPr/>
+          <ns0:nvPr/>
+        </ns0:nvSpPr>
+        <ns0:spPr>
           <a:xfrm>
             <a:off x="7635240" y="5513832"/>
             <a:ext cx="1051560" cy="384048"/>
@@ -7997,15 +7958,15 @@
             </a:solidFill>
             <a:prstDash val="solid"/>
           </a:ln>
-        </p:spPr>
-      </p:sp>
-      <p:sp>
-        <p:nvSpPr>
-          <p:cNvPr id="27" name="Text 25"/>
-          <p:cNvSpPr/>
-          <p:nvPr/>
-        </p:nvSpPr>
-        <p:spPr>
+        </ns0:spPr>
+      </ns0:sp>
+      <ns0:sp>
+        <ns0:nvSpPr>
+          <ns0:cNvPr id="27" name="Text 25"/>
+          <ns0:cNvSpPr/>
+          <ns0:nvPr/>
+        </ns0:nvSpPr>
+        <ns0:spPr>
           <a:xfrm>
             <a:off x="7680960" y="5577840"/>
             <a:ext cx="960120" cy="219456"/>
@@ -8015,8 +7976,8 @@
           </a:prstGeom>
           <a:noFill/>
           <a:ln/>
-        </p:spPr>
-        <p:txBody>
+        </ns0:spPr>
+        <ns0:txBody>
           <a:bodyPr wrap="square" lIns="508" tIns="508" rIns="508" bIns="508" rtlCol="0" anchor="ctr">
             <a:normAutofit/>
           </a:bodyPr>
@@ -8038,15 +7999,15 @@
             </a:r>
             <a:endParaRPr lang="en-US" sz="930" dirty="0"/>
           </a:p>
-        </p:txBody>
-      </p:sp>
-      <p:sp>
-        <p:nvSpPr>
-          <p:cNvPr id="28" name="Shape 26"/>
-          <p:cNvSpPr/>
-          <p:nvPr/>
-        </p:nvSpPr>
-        <p:spPr>
+        </ns0:txBody>
+      </ns0:sp>
+      <ns0:sp>
+        <ns0:nvSpPr>
+          <ns0:cNvPr id="28" name="Shape 26"/>
+          <ns0:cNvSpPr/>
+          <ns0:nvPr/>
+        </ns0:nvSpPr>
+        <ns0:spPr>
           <a:xfrm>
             <a:off x="8842248" y="5513832"/>
             <a:ext cx="1051560" cy="384048"/>
@@ -8067,15 +8028,15 @@
             </a:solidFill>
             <a:prstDash val="solid"/>
           </a:ln>
-        </p:spPr>
-      </p:sp>
-      <p:sp>
-        <p:nvSpPr>
-          <p:cNvPr id="29" name="Text 27"/>
-          <p:cNvSpPr/>
-          <p:nvPr/>
-        </p:nvSpPr>
-        <p:spPr>
+        </ns0:spPr>
+      </ns0:sp>
+      <ns0:sp>
+        <ns0:nvSpPr>
+          <ns0:cNvPr id="29" name="Text 27"/>
+          <ns0:cNvSpPr/>
+          <ns0:nvPr/>
+        </ns0:nvSpPr>
+        <ns0:spPr>
           <a:xfrm>
             <a:off x="8887968" y="5577840"/>
             <a:ext cx="960120" cy="219456"/>
@@ -8085,8 +8046,8 @@
           </a:prstGeom>
           <a:noFill/>
           <a:ln/>
-        </p:spPr>
-        <p:txBody>
+        </ns0:spPr>
+        <ns0:txBody>
           <a:bodyPr wrap="square" lIns="508" tIns="508" rIns="508" bIns="508" rtlCol="0" anchor="ctr">
             <a:normAutofit/>
           </a:bodyPr>
@@ -8108,15 +8069,15 @@
             </a:r>
             <a:endParaRPr lang="en-US" sz="930" dirty="0"/>
           </a:p>
-        </p:txBody>
-      </p:sp>
-      <p:sp>
-        <p:nvSpPr>
-          <p:cNvPr id="30" name="Shape 28"/>
-          <p:cNvSpPr/>
-          <p:nvPr/>
-        </p:nvSpPr>
-        <p:spPr>
+        </ns0:txBody>
+      </ns0:sp>
+      <ns0:sp>
+        <ns0:nvSpPr>
+          <ns0:cNvPr id="30" name="Shape 28"/>
+          <ns0:cNvSpPr/>
+          <ns0:nvPr/>
+        </ns0:nvSpPr>
+        <ns0:spPr>
           <a:xfrm>
             <a:off x="10049256" y="5513832"/>
             <a:ext cx="1051560" cy="384048"/>
@@ -8137,15 +8098,15 @@
             </a:solidFill>
             <a:prstDash val="solid"/>
           </a:ln>
-        </p:spPr>
-      </p:sp>
-      <p:sp>
-        <p:nvSpPr>
-          <p:cNvPr id="31" name="Text 29"/>
-          <p:cNvSpPr/>
-          <p:nvPr/>
-        </p:nvSpPr>
-        <p:spPr>
+        </ns0:spPr>
+      </ns0:sp>
+      <ns0:sp>
+        <ns0:nvSpPr>
+          <ns0:cNvPr id="31" name="Text 29"/>
+          <ns0:cNvSpPr/>
+          <ns0:nvPr/>
+        </ns0:nvSpPr>
+        <ns0:spPr>
           <a:xfrm>
             <a:off x="10094976" y="5577840"/>
             <a:ext cx="960120" cy="219456"/>
@@ -8155,8 +8116,8 @@
           </a:prstGeom>
           <a:noFill/>
           <a:ln/>
-        </p:spPr>
-        <p:txBody>
+        </ns0:spPr>
+        <ns0:txBody>
           <a:bodyPr wrap="square" lIns="508" tIns="508" rIns="508" bIns="508" rtlCol="0" anchor="ctr">
             <a:normAutofit/>
           </a:bodyPr>
@@ -8178,19 +8139,19 @@
             </a:r>
             <a:endParaRPr lang="en-US" sz="930" dirty="0"/>
           </a:p>
-        </p:txBody>
-      </p:sp>
-      <p:sp>
-        <p:nvSpPr>
-          <p:cNvPr id="25" name="Slide Number Placeholder 0"/>
-          <p:cNvSpPr>
+        </ns0:txBody>
+      </ns0:sp>
+      <ns0:sp>
+        <ns0:nvSpPr>
+          <ns0:cNvPr id="25" name="Slide Number Placeholder 0"/>
+          <ns0:cNvSpPr>
             <a:spLocks noGrp="1"/>
-          </p:cNvSpPr>
-          <p:nvPr>
-            <p:ph type="sldNum" sz="quarter" idx="4294967295"/>
-          </p:nvPr>
-        </p:nvSpPr>
-        <p:spPr>
+          </ns0:cNvSpPr>
+          <ns0:nvPr>
+            <ns0:ph type="sldNum" sz="quarter" idx="4294967295"/>
+          </ns0:nvPr>
+        </ns0:nvSpPr>
+        <ns0:spPr>
           <a:xfrm>
             <a:off x="11658600" y="6446520"/>
             <a:ext cx="274320" cy="182880"/>
@@ -8200,11 +8161,11 @@
           </a:prstGeom>
           <a:extLst>
             <a:ext uri="{C572A759-6A51-4108-AA02-DFA0A04FC94B}">
-              <ma14:wrappingTextBoxFlag xmlns:ma14="http://schemas.microsoft.com/office/mac/drawingml/2011/main" val="0"/>
+              <ns2:wrappingTextBoxFlag val="0"/>
             </a:ext>
           </a:extLst>
-        </p:spPr>
-        <p:txBody>
+        </ns0:spPr>
+        <ns0:txBody>
           <a:bodyPr/>
           <a:lstStyle>
             <a:lvl1pPr>
@@ -8226,14 +8187,14 @@
             </a:fld>
             <a:endParaRPr lang="en-US"/>
           </a:p>
-        </p:txBody>
-      </p:sp>
-    </p:spTree>
-  </p:cSld>
-  <p:clrMapOvr>
+        </ns0:txBody>
+      </ns0:sp>
+    </ns0:spTree>
+  </ns0:cSld>
+  <ns0:clrMapOvr>
     <a:masterClrMapping/>
-  </p:clrMapOvr>
-</p:sld>
+  </ns0:clrMapOvr>
+</ns0:sld>
 </file>
 
 <file path=ppt/theme/theme1.xml><?xml version="1.0" encoding="utf-8"?>
